--- a/Deliverable4_Presentation.pptx
+++ b/Deliverable4_Presentation.pptx
@@ -19,7 +19,7 @@
     <p:sldId id="267" r:id="rId19"/>
     <p:sldId id="268" r:id="rId20"/>
   </p:sldIdLst>
-  <p:sldSz cx="9144000" cy="6858000" type="screen4x3"/>
+  <p:sldSz cx="12191695" cy="6858000" type="screen4x3"/>
   <p:notesSz cx="6858000" cy="9144000"/>
   <p:defaultTextStyle>
     <a:defPPr>
@@ -4362,14 +4362,102 @@
       <p:grpSpPr/>
       <p:sp>
         <p:nvSpPr>
-          <p:cNvPr id="2" name="TextBox 1"/>
+          <p:cNvPr id="2" name="Rectangle 1"/>
+          <p:cNvSpPr/>
+          <p:nvPr/>
+        </p:nvSpPr>
+        <p:spPr>
+          <a:xfrm>
+            <a:off x="0" y="0"/>
+            <a:ext cx="256032" cy="6858000"/>
+          </a:xfrm>
+          <a:prstGeom prst="rect">
+            <a:avLst/>
+          </a:prstGeom>
+          <a:solidFill>
+            <a:srgbClr val="1F364D"/>
+          </a:solidFill>
+          <a:ln>
+            <a:noFill/>
+          </a:ln>
+          <a:effectLst/>
+        </p:spPr>
+        <p:style>
+          <a:lnRef idx="1">
+            <a:schemeClr val="accent1"/>
+          </a:lnRef>
+          <a:fillRef idx="3">
+            <a:schemeClr val="accent1"/>
+          </a:fillRef>
+          <a:effectRef idx="2">
+            <a:schemeClr val="accent1"/>
+          </a:effectRef>
+          <a:fontRef idx="minor">
+            <a:schemeClr val="lt1"/>
+          </a:fontRef>
+        </p:style>
+        <p:txBody>
+          <a:bodyPr rtlCol="0" anchor="ctr"/>
+          <a:lstStyle/>
+          <a:p>
+            <a:pPr algn="ctr"/>
+          </a:p>
+        </p:txBody>
+      </p:sp>
+      <p:sp>
+        <p:nvSpPr>
+          <p:cNvPr id="3" name="Rectangle 2"/>
+          <p:cNvSpPr/>
+          <p:nvPr/>
+        </p:nvSpPr>
+        <p:spPr>
+          <a:xfrm>
+            <a:off x="822960" y="1737360"/>
+            <a:ext cx="2011680" cy="64008"/>
+          </a:xfrm>
+          <a:prstGeom prst="rect">
+            <a:avLst/>
+          </a:prstGeom>
+          <a:solidFill>
+            <a:srgbClr val="1E8E4F"/>
+          </a:solidFill>
+          <a:ln>
+            <a:noFill/>
+          </a:ln>
+          <a:effectLst/>
+        </p:spPr>
+        <p:style>
+          <a:lnRef idx="1">
+            <a:schemeClr val="accent1"/>
+          </a:lnRef>
+          <a:fillRef idx="3">
+            <a:schemeClr val="accent1"/>
+          </a:fillRef>
+          <a:effectRef idx="2">
+            <a:schemeClr val="accent1"/>
+          </a:effectRef>
+          <a:fontRef idx="minor">
+            <a:schemeClr val="lt1"/>
+          </a:fontRef>
+        </p:style>
+        <p:txBody>
+          <a:bodyPr rtlCol="0" anchor="ctr"/>
+          <a:lstStyle/>
+          <a:p>
+            <a:pPr algn="ctr"/>
+          </a:p>
+        </p:txBody>
+      </p:sp>
+      <p:sp>
+        <p:nvSpPr>
+          <p:cNvPr id="4" name="TextBox 3"/>
           <p:cNvSpPr txBox="1"/>
           <p:nvPr/>
         </p:nvSpPr>
         <p:spPr>
           <a:xfrm>
-            <a:off x="640080" y="2011680"/>
-            <a:ext cx="7863840" cy="2194560"/>
+            <a:off x="822960" y="2048256"/>
+            <a:ext cx="10241280" cy="1600200"/>
           </a:xfrm>
           <a:prstGeom prst="rect">
             <a:avLst/>
@@ -4377,28 +4465,298 @@
           <a:noFill/>
         </p:spPr>
         <p:txBody>
-          <a:bodyPr wrap="square">
+          <a:bodyPr wrap="square" anchor="t" lIns="0" rIns="0" tIns="0" bIns="0">
             <a:spAutoFit/>
           </a:bodyPr>
           <a:lstStyle/>
           <a:p>
-            <a:r>
-              <a:rPr sz="3200" b="1">
+            <a:pPr>
+              <a:spcBef>
+                <a:spcPts val="0"/>
+              </a:spcBef>
+              <a:spcAft>
+                <a:spcPts val="0"/>
+              </a:spcAft>
+            </a:pPr>
+            <a:r>
+              <a:rPr sz="3600" b="1">
                 <a:solidFill>
                   <a:srgbClr val="1F364D"/>
                 </a:solidFill>
+                <a:latin typeface="Calibri"/>
               </a:rPr>
               <a:t>Developing and Optimizing Data Structures for a Dynamic Inventory Management System in Python</a:t>
             </a:r>
           </a:p>
-          <a:p>
-            <a:r>
-              <a:rPr sz="1800">
-                <a:solidFill>
-                  <a:srgbClr val="666666"/>
-                </a:solidFill>
-              </a:rPr>
-              <a:t>Rahul Solanki  |  MSCS-532-B01: Algorithms and Data Structures  |  August 2, 2026</a:t>
+        </p:txBody>
+      </p:sp>
+      <p:sp>
+        <p:nvSpPr>
+          <p:cNvPr id="5" name="TextBox 4"/>
+          <p:cNvSpPr txBox="1"/>
+          <p:nvPr/>
+        </p:nvSpPr>
+        <p:spPr>
+          <a:xfrm>
+            <a:off x="822960" y="3712463"/>
+            <a:ext cx="10241280" cy="365760"/>
+          </a:xfrm>
+          <a:prstGeom prst="rect">
+            <a:avLst/>
+          </a:prstGeom>
+          <a:noFill/>
+        </p:spPr>
+        <p:txBody>
+          <a:bodyPr wrap="square" anchor="t" lIns="0" rIns="0" tIns="0" bIns="0">
+            <a:spAutoFit/>
+          </a:bodyPr>
+          <a:lstStyle/>
+          <a:p>
+            <a:pPr>
+              <a:spcBef>
+                <a:spcPts val="0"/>
+              </a:spcBef>
+              <a:spcAft>
+                <a:spcPts val="0"/>
+              </a:spcAft>
+            </a:pPr>
+            <a:r>
+              <a:rPr sz="1800" b="0">
+                <a:solidFill>
+                  <a:srgbClr val="6B727B"/>
+                </a:solidFill>
+                <a:latin typeface="Calibri"/>
+              </a:rPr>
+              <a:t>Term Project, Deliverable 4: Final Presentation</a:t>
+            </a:r>
+          </a:p>
+        </p:txBody>
+      </p:sp>
+      <p:sp>
+        <p:nvSpPr>
+          <p:cNvPr id="6" name="Rectangle 5"/>
+          <p:cNvSpPr/>
+          <p:nvPr/>
+        </p:nvSpPr>
+        <p:spPr>
+          <a:xfrm>
+            <a:off x="822960" y="4315968"/>
+            <a:ext cx="3840480" cy="10972"/>
+          </a:xfrm>
+          <a:prstGeom prst="rect">
+            <a:avLst/>
+          </a:prstGeom>
+          <a:solidFill>
+            <a:srgbClr val="D8DCE1"/>
+          </a:solidFill>
+          <a:ln>
+            <a:noFill/>
+          </a:ln>
+          <a:effectLst/>
+        </p:spPr>
+        <p:style>
+          <a:lnRef idx="1">
+            <a:schemeClr val="accent1"/>
+          </a:lnRef>
+          <a:fillRef idx="3">
+            <a:schemeClr val="accent1"/>
+          </a:fillRef>
+          <a:effectRef idx="2">
+            <a:schemeClr val="accent1"/>
+          </a:effectRef>
+          <a:fontRef idx="minor">
+            <a:schemeClr val="lt1"/>
+          </a:fontRef>
+        </p:style>
+        <p:txBody>
+          <a:bodyPr rtlCol="0" anchor="ctr"/>
+          <a:lstStyle/>
+          <a:p>
+            <a:pPr algn="ctr"/>
+          </a:p>
+        </p:txBody>
+      </p:sp>
+      <p:sp>
+        <p:nvSpPr>
+          <p:cNvPr id="7" name="TextBox 6"/>
+          <p:cNvSpPr txBox="1"/>
+          <p:nvPr/>
+        </p:nvSpPr>
+        <p:spPr>
+          <a:xfrm>
+            <a:off x="822960" y="4553712"/>
+            <a:ext cx="10241280" cy="1371600"/>
+          </a:xfrm>
+          <a:prstGeom prst="rect">
+            <a:avLst/>
+          </a:prstGeom>
+          <a:noFill/>
+        </p:spPr>
+        <p:txBody>
+          <a:bodyPr wrap="square" anchor="t" lIns="0" rIns="0" tIns="0" bIns="0">
+            <a:spAutoFit/>
+          </a:bodyPr>
+          <a:lstStyle/>
+          <a:p>
+            <a:pPr>
+              <a:spcBef>
+                <a:spcPts val="0"/>
+              </a:spcBef>
+              <a:spcAft>
+                <a:spcPts val="400"/>
+              </a:spcAft>
+            </a:pPr>
+            <a:r>
+              <a:rPr sz="1800" b="1">
+                <a:solidFill>
+                  <a:srgbClr val="1F364D"/>
+                </a:solidFill>
+                <a:latin typeface="Calibri"/>
+              </a:rPr>
+              <a:t>Rahul Solanki</a:t>
+            </a:r>
+          </a:p>
+          <a:p>
+            <a:pPr>
+              <a:spcBef>
+                <a:spcPts val="0"/>
+              </a:spcBef>
+              <a:spcAft>
+                <a:spcPts val="300"/>
+              </a:spcAft>
+            </a:pPr>
+            <a:r>
+              <a:rPr sz="1400" b="0">
+                <a:solidFill>
+                  <a:srgbClr val="6B727B"/>
+                </a:solidFill>
+                <a:latin typeface="Calibri"/>
+              </a:rPr>
+              <a:t>MSCS-532-B01: Algorithms and Data Structures</a:t>
+            </a:r>
+          </a:p>
+          <a:p>
+            <a:pPr>
+              <a:spcBef>
+                <a:spcPts val="0"/>
+              </a:spcBef>
+              <a:spcAft>
+                <a:spcPts val="300"/>
+              </a:spcAft>
+            </a:pPr>
+            <a:r>
+              <a:rPr sz="1400" b="0">
+                <a:solidFill>
+                  <a:srgbClr val="6B727B"/>
+                </a:solidFill>
+                <a:latin typeface="Calibri"/>
+              </a:rPr>
+              <a:t>School of Computer and Information Sciences, University of the Cumberlands  |  Dr. Michael Solomon</a:t>
+            </a:r>
+          </a:p>
+          <a:p>
+            <a:pPr>
+              <a:spcBef>
+                <a:spcPts val="0"/>
+              </a:spcBef>
+              <a:spcAft>
+                <a:spcPts val="0"/>
+              </a:spcAft>
+            </a:pPr>
+            <a:r>
+              <a:rPr sz="1400" b="0">
+                <a:solidFill>
+                  <a:srgbClr val="6B727B"/>
+                </a:solidFill>
+                <a:latin typeface="Calibri"/>
+              </a:rPr>
+              <a:t>August 2, 2026</a:t>
+            </a:r>
+          </a:p>
+        </p:txBody>
+      </p:sp>
+      <p:sp>
+        <p:nvSpPr>
+          <p:cNvPr id="8" name="Rectangle 7"/>
+          <p:cNvSpPr/>
+          <p:nvPr/>
+        </p:nvSpPr>
+        <p:spPr>
+          <a:xfrm>
+            <a:off x="0" y="6327648"/>
+            <a:ext cx="12191695" cy="530352"/>
+          </a:xfrm>
+          <a:prstGeom prst="rect">
+            <a:avLst/>
+          </a:prstGeom>
+          <a:solidFill>
+            <a:srgbClr val="1F364D"/>
+          </a:solidFill>
+          <a:ln>
+            <a:noFill/>
+          </a:ln>
+          <a:effectLst/>
+        </p:spPr>
+        <p:style>
+          <a:lnRef idx="1">
+            <a:schemeClr val="accent1"/>
+          </a:lnRef>
+          <a:fillRef idx="3">
+            <a:schemeClr val="accent1"/>
+          </a:fillRef>
+          <a:effectRef idx="2">
+            <a:schemeClr val="accent1"/>
+          </a:effectRef>
+          <a:fontRef idx="minor">
+            <a:schemeClr val="lt1"/>
+          </a:fontRef>
+        </p:style>
+        <p:txBody>
+          <a:bodyPr rtlCol="0" anchor="ctr"/>
+          <a:lstStyle/>
+          <a:p>
+            <a:pPr algn="ctr"/>
+          </a:p>
+        </p:txBody>
+      </p:sp>
+      <p:sp>
+        <p:nvSpPr>
+          <p:cNvPr id="9" name="TextBox 8"/>
+          <p:cNvSpPr txBox="1"/>
+          <p:nvPr/>
+        </p:nvSpPr>
+        <p:spPr>
+          <a:xfrm>
+            <a:off x="822960" y="6455664"/>
+            <a:ext cx="10241280" cy="274320"/>
+          </a:xfrm>
+          <a:prstGeom prst="rect">
+            <a:avLst/>
+          </a:prstGeom>
+          <a:noFill/>
+        </p:spPr>
+        <p:txBody>
+          <a:bodyPr wrap="square" anchor="ctr" lIns="0" rIns="0" tIns="0" bIns="0">
+            <a:spAutoFit/>
+          </a:bodyPr>
+          <a:lstStyle/>
+          <a:p>
+            <a:pPr>
+              <a:spcBef>
+                <a:spcPts val="0"/>
+              </a:spcBef>
+              <a:spcAft>
+                <a:spcPts val="0"/>
+              </a:spcAft>
+            </a:pPr>
+            <a:r>
+              <a:rPr sz="1200" b="0">
+                <a:solidFill>
+                  <a:srgbClr val="FFFFFF"/>
+                </a:solidFill>
+                <a:latin typeface="Calibri"/>
+              </a:rPr>
+              <a:t>https://github.com/iknalos/MSCS-532-Project-Deliverable-4</a:t>
             </a:r>
           </a:p>
         </p:txBody>
@@ -4429,8 +4787,8 @@
         </p:nvSpPr>
         <p:spPr>
           <a:xfrm>
-            <a:off x="457200" y="320040"/>
-            <a:ext cx="8229600" cy="914400"/>
+            <a:off x="822960" y="475488"/>
+            <a:ext cx="10545775" cy="658368"/>
           </a:xfrm>
           <a:prstGeom prst="rect">
             <a:avLst/>
@@ -4438,16 +4796,25 @@
           <a:noFill/>
         </p:spPr>
         <p:txBody>
-          <a:bodyPr wrap="none">
+          <a:bodyPr wrap="square" anchor="t" lIns="0" rIns="0" tIns="0" bIns="0">
             <a:spAutoFit/>
           </a:bodyPr>
           <a:lstStyle/>
           <a:p>
-            <a:r>
-              <a:rPr sz="3000" b="1">
+            <a:pPr>
+              <a:spcBef>
+                <a:spcPts val="0"/>
+              </a:spcBef>
+              <a:spcAft>
+                <a:spcPts val="0"/>
+              </a:spcAft>
+            </a:pPr>
+            <a:r>
+              <a:rPr sz="2800" b="1">
                 <a:solidFill>
                   <a:srgbClr val="1F364D"/>
                 </a:solidFill>
+                <a:latin typeface="Calibri"/>
               </a:rPr>
               <a:t>Asymptotics Dominate at Scale</a:t>
             </a:r>
@@ -4456,14 +4823,102 @@
       </p:sp>
       <p:sp>
         <p:nvSpPr>
-          <p:cNvPr id="3" name="TextBox 2"/>
+          <p:cNvPr id="3" name="Rectangle 2"/>
+          <p:cNvSpPr/>
+          <p:nvPr/>
+        </p:nvSpPr>
+        <p:spPr>
+          <a:xfrm>
+            <a:off x="822960" y="1170432"/>
+            <a:ext cx="1371600" cy="50292"/>
+          </a:xfrm>
+          <a:prstGeom prst="rect">
+            <a:avLst/>
+          </a:prstGeom>
+          <a:solidFill>
+            <a:srgbClr val="1E8E4F"/>
+          </a:solidFill>
+          <a:ln>
+            <a:noFill/>
+          </a:ln>
+          <a:effectLst/>
+        </p:spPr>
+        <p:style>
+          <a:lnRef idx="1">
+            <a:schemeClr val="accent1"/>
+          </a:lnRef>
+          <a:fillRef idx="3">
+            <a:schemeClr val="accent1"/>
+          </a:fillRef>
+          <a:effectRef idx="2">
+            <a:schemeClr val="accent1"/>
+          </a:effectRef>
+          <a:fontRef idx="minor">
+            <a:schemeClr val="lt1"/>
+          </a:fontRef>
+        </p:style>
+        <p:txBody>
+          <a:bodyPr rtlCol="0" anchor="ctr"/>
+          <a:lstStyle/>
+          <a:p>
+            <a:pPr algn="ctr"/>
+          </a:p>
+        </p:txBody>
+      </p:sp>
+      <p:sp>
+        <p:nvSpPr>
+          <p:cNvPr id="4" name="Rectangle 3"/>
+          <p:cNvSpPr/>
+          <p:nvPr/>
+        </p:nvSpPr>
+        <p:spPr>
+          <a:xfrm>
+            <a:off x="822960" y="6089904"/>
+            <a:ext cx="10545775" cy="10972"/>
+          </a:xfrm>
+          <a:prstGeom prst="rect">
+            <a:avLst/>
+          </a:prstGeom>
+          <a:solidFill>
+            <a:srgbClr val="D8DCE1"/>
+          </a:solidFill>
+          <a:ln>
+            <a:noFill/>
+          </a:ln>
+          <a:effectLst/>
+        </p:spPr>
+        <p:style>
+          <a:lnRef idx="1">
+            <a:schemeClr val="accent1"/>
+          </a:lnRef>
+          <a:fillRef idx="3">
+            <a:schemeClr val="accent1"/>
+          </a:fillRef>
+          <a:effectRef idx="2">
+            <a:schemeClr val="accent1"/>
+          </a:effectRef>
+          <a:fontRef idx="minor">
+            <a:schemeClr val="lt1"/>
+          </a:fontRef>
+        </p:style>
+        <p:txBody>
+          <a:bodyPr rtlCol="0" anchor="ctr"/>
+          <a:lstStyle/>
+          <a:p>
+            <a:pPr algn="ctr"/>
+          </a:p>
+        </p:txBody>
+      </p:sp>
+      <p:sp>
+        <p:nvSpPr>
+          <p:cNvPr id="5" name="TextBox 4"/>
           <p:cNvSpPr txBox="1"/>
           <p:nvPr/>
         </p:nvSpPr>
         <p:spPr>
           <a:xfrm>
-            <a:off x="640080" y="1371600"/>
-            <a:ext cx="4023360" cy="4846320"/>
+            <a:off x="822960" y="6236208"/>
+            <a:ext cx="9814255" cy="256032"/>
           </a:xfrm>
           <a:prstGeom prst="rect">
             <a:avLst/>
@@ -4471,51 +4926,174 @@
           <a:noFill/>
         </p:spPr>
         <p:txBody>
-          <a:bodyPr wrap="square">
+          <a:bodyPr wrap="square" anchor="t" lIns="0" rIns="0" tIns="0" bIns="0">
             <a:spAutoFit/>
           </a:bodyPr>
           <a:lstStyle/>
           <a:p>
             <a:pPr>
-              <a:spcAft>
-                <a:spcPts val="1000"/>
-              </a:spcAft>
-            </a:pPr>
-            <a:r>
-              <a:rPr sz="2000">
+              <a:spcBef>
+                <a:spcPts val="0"/>
+              </a:spcBef>
+              <a:spcAft>
+                <a:spcPts val="0"/>
+              </a:spcAft>
+            </a:pPr>
+            <a:r>
+              <a:rPr sz="1000" b="0">
+                <a:solidFill>
+                  <a:srgbClr val="6B727B"/>
+                </a:solidFill>
+                <a:latin typeface="Calibri"/>
+              </a:rPr>
+              <a:t>Rahul Solanki  |  MSCS-532-B01  |  Dynamic Inventory Management</a:t>
+            </a:r>
+          </a:p>
+        </p:txBody>
+      </p:sp>
+      <p:sp>
+        <p:nvSpPr>
+          <p:cNvPr id="6" name="TextBox 5"/>
+          <p:cNvSpPr txBox="1"/>
+          <p:nvPr/>
+        </p:nvSpPr>
+        <p:spPr>
+          <a:xfrm>
+            <a:off x="10637215" y="6236208"/>
+            <a:ext cx="731520" cy="256032"/>
+          </a:xfrm>
+          <a:prstGeom prst="rect">
+            <a:avLst/>
+          </a:prstGeom>
+          <a:noFill/>
+        </p:spPr>
+        <p:txBody>
+          <a:bodyPr wrap="square" anchor="t" lIns="0" rIns="0" tIns="0" bIns="0">
+            <a:spAutoFit/>
+          </a:bodyPr>
+          <a:lstStyle/>
+          <a:p>
+            <a:pPr algn="r">
+              <a:spcBef>
+                <a:spcPts val="0"/>
+              </a:spcBef>
+              <a:spcAft>
+                <a:spcPts val="0"/>
+              </a:spcAft>
+            </a:pPr>
+            <a:r>
+              <a:rPr sz="1000" b="0">
+                <a:solidFill>
+                  <a:srgbClr val="6B727B"/>
+                </a:solidFill>
+                <a:latin typeface="Calibri"/>
+              </a:rPr>
+              <a:t>10</a:t>
+            </a:r>
+          </a:p>
+        </p:txBody>
+      </p:sp>
+      <p:sp>
+        <p:nvSpPr>
+          <p:cNvPr id="7" name="TextBox 6"/>
+          <p:cNvSpPr txBox="1"/>
+          <p:nvPr/>
+        </p:nvSpPr>
+        <p:spPr>
+          <a:xfrm>
+            <a:off x="822960" y="1536192"/>
+            <a:ext cx="4526280" cy="4389120"/>
+          </a:xfrm>
+          <a:prstGeom prst="rect">
+            <a:avLst/>
+          </a:prstGeom>
+          <a:noFill/>
+        </p:spPr>
+        <p:txBody>
+          <a:bodyPr wrap="square" anchor="ctr" lIns="0" rIns="0" tIns="0" bIns="0">
+            <a:spAutoFit/>
+          </a:bodyPr>
+          <a:lstStyle/>
+          <a:p>
+            <a:pPr marL="274320" indent="-274320">
+              <a:lnSpc>
+                <a:spcPct val="105000"/>
+              </a:lnSpc>
+              <a:spcBef>
+                <a:spcPts val="0"/>
+              </a:spcBef>
+              <a:spcAft>
+                <a:spcPts val="300"/>
+              </a:spcAft>
+              <a:buClr>
+                <a:srgbClr val="1E8E4F"/>
+              </a:buClr>
+              <a:buSzPct val="85000"/>
+              <a:buFont typeface="Arial"/>
+              <a:buChar char="▪"/>
+            </a:pPr>
+            <a:r>
+              <a:rPr sz="2000" b="0">
                 <a:solidFill>
                   <a:srgbClr val="1F364D"/>
                 </a:solidFill>
+                <a:latin typeface="Calibri"/>
               </a:rPr>
               <a:t>Log-log: diverging curves = an O(n) term removed</a:t>
             </a:r>
           </a:p>
           <a:p>
-            <a:pPr lvl="1">
-              <a:spcAft>
-                <a:spcPts val="1000"/>
-              </a:spcAft>
-            </a:pPr>
-            <a:r>
-              <a:rPr sz="1600">
-                <a:solidFill>
-                  <a:srgbClr val="444444"/>
-                </a:solidFill>
+            <a:pPr marL="676656" indent="-256032">
+              <a:lnSpc>
+                <a:spcPct val="105000"/>
+              </a:lnSpc>
+              <a:spcBef>
+                <a:spcPts val="500"/>
+              </a:spcBef>
+              <a:spcAft>
+                <a:spcPts val="300"/>
+              </a:spcAft>
+              <a:buClr>
+                <a:srgbClr val="6B727B"/>
+              </a:buClr>
+              <a:buSzPct val="85000"/>
+              <a:buFont typeface="Arial"/>
+              <a:buChar char="–"/>
+            </a:pPr>
+            <a:r>
+              <a:rPr sz="1600" b="0">
+                <a:solidFill>
+                  <a:srgbClr val="333A42"/>
+                </a:solidFill>
+                <a:latin typeface="Calibri"/>
               </a:rPr>
               <a:t>Baseline update cost grows linearly with n</a:t>
             </a:r>
           </a:p>
           <a:p>
-            <a:pPr lvl="1">
-              <a:spcAft>
-                <a:spcPts val="1000"/>
-              </a:spcAft>
-            </a:pPr>
-            <a:r>
-              <a:rPr sz="1600">
-                <a:solidFill>
-                  <a:srgbClr val="444444"/>
-                </a:solidFill>
+            <a:pPr marL="676656" indent="-256032">
+              <a:lnSpc>
+                <a:spcPct val="105000"/>
+              </a:lnSpc>
+              <a:spcBef>
+                <a:spcPts val="500"/>
+              </a:spcBef>
+              <a:spcAft>
+                <a:spcPts val="300"/>
+              </a:spcAft>
+              <a:buClr>
+                <a:srgbClr val="6B727B"/>
+              </a:buClr>
+              <a:buSzPct val="85000"/>
+              <a:buFont typeface="Arial"/>
+              <a:buChar char="–"/>
+            </a:pPr>
+            <a:r>
+              <a:rPr sz="1600" b="0">
+                <a:solidFill>
+                  <a:srgbClr val="333A42"/>
+                </a:solidFill>
+                <a:latin typeface="Calibri"/>
               </a:rPr>
               <a:t>Indexed heap stays near-flat</a:t>
             </a:r>
@@ -4524,7 +5102,7 @@
       </p:sp>
       <p:pic>
         <p:nvPicPr>
-          <p:cNvPr id="4" name="Picture 3" descr="update_qty.png"/>
+          <p:cNvPr id="8" name="Picture 7" descr="update_qty.png"/>
           <p:cNvPicPr>
             <a:picLocks noChangeAspect="1"/>
           </p:cNvPicPr>
@@ -4538,8 +5116,8 @@
         </p:blipFill>
         <p:spPr>
           <a:xfrm>
-            <a:off x="4663440" y="1463040"/>
-            <a:ext cx="4206240" cy="2704011"/>
+            <a:off x="5623560" y="1884970"/>
+            <a:ext cx="5742432" cy="3691563"/>
           </a:xfrm>
           <a:prstGeom prst="rect">
             <a:avLst/>
@@ -4572,8 +5150,8 @@
         </p:nvSpPr>
         <p:spPr>
           <a:xfrm>
-            <a:off x="457200" y="320040"/>
-            <a:ext cx="8229600" cy="914400"/>
+            <a:off x="822960" y="475488"/>
+            <a:ext cx="10545775" cy="658368"/>
           </a:xfrm>
           <a:prstGeom prst="rect">
             <a:avLst/>
@@ -4581,16 +5159,25 @@
           <a:noFill/>
         </p:spPr>
         <p:txBody>
-          <a:bodyPr wrap="none">
+          <a:bodyPr wrap="square" anchor="t" lIns="0" rIns="0" tIns="0" bIns="0">
             <a:spAutoFit/>
           </a:bodyPr>
           <a:lstStyle/>
           <a:p>
-            <a:r>
-              <a:rPr sz="3000" b="1">
+            <a:pPr>
+              <a:spcBef>
+                <a:spcPts val="0"/>
+              </a:spcBef>
+              <a:spcAft>
+                <a:spcPts val="0"/>
+              </a:spcAft>
+            </a:pPr>
+            <a:r>
+              <a:rPr sz="2800" b="1">
                 <a:solidFill>
                   <a:srgbClr val="1F364D"/>
                 </a:solidFill>
+                <a:latin typeface="Calibri"/>
               </a:rPr>
               <a:t>Same Story for Low-Stock Alerts</a:t>
             </a:r>
@@ -4599,14 +5186,102 @@
       </p:sp>
       <p:sp>
         <p:nvSpPr>
-          <p:cNvPr id="3" name="TextBox 2"/>
+          <p:cNvPr id="3" name="Rectangle 2"/>
+          <p:cNvSpPr/>
+          <p:nvPr/>
+        </p:nvSpPr>
+        <p:spPr>
+          <a:xfrm>
+            <a:off x="822960" y="1170432"/>
+            <a:ext cx="1371600" cy="50292"/>
+          </a:xfrm>
+          <a:prstGeom prst="rect">
+            <a:avLst/>
+          </a:prstGeom>
+          <a:solidFill>
+            <a:srgbClr val="1E8E4F"/>
+          </a:solidFill>
+          <a:ln>
+            <a:noFill/>
+          </a:ln>
+          <a:effectLst/>
+        </p:spPr>
+        <p:style>
+          <a:lnRef idx="1">
+            <a:schemeClr val="accent1"/>
+          </a:lnRef>
+          <a:fillRef idx="3">
+            <a:schemeClr val="accent1"/>
+          </a:fillRef>
+          <a:effectRef idx="2">
+            <a:schemeClr val="accent1"/>
+          </a:effectRef>
+          <a:fontRef idx="minor">
+            <a:schemeClr val="lt1"/>
+          </a:fontRef>
+        </p:style>
+        <p:txBody>
+          <a:bodyPr rtlCol="0" anchor="ctr"/>
+          <a:lstStyle/>
+          <a:p>
+            <a:pPr algn="ctr"/>
+          </a:p>
+        </p:txBody>
+      </p:sp>
+      <p:sp>
+        <p:nvSpPr>
+          <p:cNvPr id="4" name="Rectangle 3"/>
+          <p:cNvSpPr/>
+          <p:nvPr/>
+        </p:nvSpPr>
+        <p:spPr>
+          <a:xfrm>
+            <a:off x="822960" y="6089904"/>
+            <a:ext cx="10545775" cy="10972"/>
+          </a:xfrm>
+          <a:prstGeom prst="rect">
+            <a:avLst/>
+          </a:prstGeom>
+          <a:solidFill>
+            <a:srgbClr val="D8DCE1"/>
+          </a:solidFill>
+          <a:ln>
+            <a:noFill/>
+          </a:ln>
+          <a:effectLst/>
+        </p:spPr>
+        <p:style>
+          <a:lnRef idx="1">
+            <a:schemeClr val="accent1"/>
+          </a:lnRef>
+          <a:fillRef idx="3">
+            <a:schemeClr val="accent1"/>
+          </a:fillRef>
+          <a:effectRef idx="2">
+            <a:schemeClr val="accent1"/>
+          </a:effectRef>
+          <a:fontRef idx="minor">
+            <a:schemeClr val="lt1"/>
+          </a:fontRef>
+        </p:style>
+        <p:txBody>
+          <a:bodyPr rtlCol="0" anchor="ctr"/>
+          <a:lstStyle/>
+          <a:p>
+            <a:pPr algn="ctr"/>
+          </a:p>
+        </p:txBody>
+      </p:sp>
+      <p:sp>
+        <p:nvSpPr>
+          <p:cNvPr id="5" name="TextBox 4"/>
           <p:cNvSpPr txBox="1"/>
           <p:nvPr/>
         </p:nvSpPr>
         <p:spPr>
           <a:xfrm>
-            <a:off x="640080" y="1371600"/>
-            <a:ext cx="4023360" cy="4846320"/>
+            <a:off x="822960" y="6236208"/>
+            <a:ext cx="9814255" cy="256032"/>
           </a:xfrm>
           <a:prstGeom prst="rect">
             <a:avLst/>
@@ -4614,51 +5289,174 @@
           <a:noFill/>
         </p:spPr>
         <p:txBody>
-          <a:bodyPr wrap="square">
+          <a:bodyPr wrap="square" anchor="t" lIns="0" rIns="0" tIns="0" bIns="0">
             <a:spAutoFit/>
           </a:bodyPr>
           <a:lstStyle/>
           <a:p>
             <a:pPr>
-              <a:spcAft>
-                <a:spcPts val="1000"/>
-              </a:spcAft>
-            </a:pPr>
-            <a:r>
-              <a:rPr sz="2000">
+              <a:spcBef>
+                <a:spcPts val="0"/>
+              </a:spcBef>
+              <a:spcAft>
+                <a:spcPts val="0"/>
+              </a:spcAft>
+            </a:pPr>
+            <a:r>
+              <a:rPr sz="1000" b="0">
+                <a:solidFill>
+                  <a:srgbClr val="6B727B"/>
+                </a:solidFill>
+                <a:latin typeface="Calibri"/>
+              </a:rPr>
+              <a:t>Rahul Solanki  |  MSCS-532-B01  |  Dynamic Inventory Management</a:t>
+            </a:r>
+          </a:p>
+        </p:txBody>
+      </p:sp>
+      <p:sp>
+        <p:nvSpPr>
+          <p:cNvPr id="6" name="TextBox 5"/>
+          <p:cNvSpPr txBox="1"/>
+          <p:nvPr/>
+        </p:nvSpPr>
+        <p:spPr>
+          <a:xfrm>
+            <a:off x="10637215" y="6236208"/>
+            <a:ext cx="731520" cy="256032"/>
+          </a:xfrm>
+          <a:prstGeom prst="rect">
+            <a:avLst/>
+          </a:prstGeom>
+          <a:noFill/>
+        </p:spPr>
+        <p:txBody>
+          <a:bodyPr wrap="square" anchor="t" lIns="0" rIns="0" tIns="0" bIns="0">
+            <a:spAutoFit/>
+          </a:bodyPr>
+          <a:lstStyle/>
+          <a:p>
+            <a:pPr algn="r">
+              <a:spcBef>
+                <a:spcPts val="0"/>
+              </a:spcBef>
+              <a:spcAft>
+                <a:spcPts val="0"/>
+              </a:spcAft>
+            </a:pPr>
+            <a:r>
+              <a:rPr sz="1000" b="0">
+                <a:solidFill>
+                  <a:srgbClr val="6B727B"/>
+                </a:solidFill>
+                <a:latin typeface="Calibri"/>
+              </a:rPr>
+              <a:t>11</a:t>
+            </a:r>
+          </a:p>
+        </p:txBody>
+      </p:sp>
+      <p:sp>
+        <p:nvSpPr>
+          <p:cNvPr id="7" name="TextBox 6"/>
+          <p:cNvSpPr txBox="1"/>
+          <p:nvPr/>
+        </p:nvSpPr>
+        <p:spPr>
+          <a:xfrm>
+            <a:off x="822960" y="1536192"/>
+            <a:ext cx="4526280" cy="4389120"/>
+          </a:xfrm>
+          <a:prstGeom prst="rect">
+            <a:avLst/>
+          </a:prstGeom>
+          <a:noFill/>
+        </p:spPr>
+        <p:txBody>
+          <a:bodyPr wrap="square" anchor="ctr" lIns="0" rIns="0" tIns="0" bIns="0">
+            <a:spAutoFit/>
+          </a:bodyPr>
+          <a:lstStyle/>
+          <a:p>
+            <a:pPr marL="274320" indent="-274320">
+              <a:lnSpc>
+                <a:spcPct val="105000"/>
+              </a:lnSpc>
+              <a:spcBef>
+                <a:spcPts val="0"/>
+              </a:spcBef>
+              <a:spcAft>
+                <a:spcPts val="300"/>
+              </a:spcAft>
+              <a:buClr>
+                <a:srgbClr val="1E8E4F"/>
+              </a:buClr>
+              <a:buSzPct val="85000"/>
+              <a:buFont typeface="Arial"/>
+              <a:buChar char="▪"/>
+            </a:pPr>
+            <a:r>
+              <a:rPr sz="2000" b="0">
                 <a:solidFill>
                   <a:srgbClr val="1F364D"/>
                 </a:solidFill>
+                <a:latin typeface="Calibri"/>
               </a:rPr>
               <a:t>Baseline: sort all n per query, O(n log n)</a:t>
             </a:r>
           </a:p>
           <a:p>
-            <a:pPr>
-              <a:spcAft>
-                <a:spcPts val="1000"/>
-              </a:spcAft>
-            </a:pPr>
-            <a:r>
-              <a:rPr sz="2000">
+            <a:pPr marL="274320" indent="-274320">
+              <a:lnSpc>
+                <a:spcPct val="105000"/>
+              </a:lnSpc>
+              <a:spcBef>
+                <a:spcPts val="1300"/>
+              </a:spcBef>
+              <a:spcAft>
+                <a:spcPts val="300"/>
+              </a:spcAft>
+              <a:buClr>
+                <a:srgbClr val="1E8E4F"/>
+              </a:buClr>
+              <a:buSzPct val="85000"/>
+              <a:buFont typeface="Arial"/>
+              <a:buChar char="▪"/>
+            </a:pPr>
+            <a:r>
+              <a:rPr sz="2000" b="0">
                 <a:solidFill>
                   <a:srgbClr val="1F364D"/>
                 </a:solidFill>
+                <a:latin typeface="Calibri"/>
               </a:rPr>
               <a:t>Optimized: O(k log k) frontier walk</a:t>
             </a:r>
           </a:p>
           <a:p>
-            <a:pPr lvl="1">
-              <a:spcAft>
-                <a:spcPts val="1000"/>
-              </a:spcAft>
-            </a:pPr>
-            <a:r>
-              <a:rPr sz="1600">
-                <a:solidFill>
-                  <a:srgbClr val="444444"/>
-                </a:solidFill>
+            <a:pPr marL="676656" indent="-256032">
+              <a:lnSpc>
+                <a:spcPct val="105000"/>
+              </a:lnSpc>
+              <a:spcBef>
+                <a:spcPts val="500"/>
+              </a:spcBef>
+              <a:spcAft>
+                <a:spcPts val="300"/>
+              </a:spcAft>
+              <a:buClr>
+                <a:srgbClr val="6B727B"/>
+              </a:buClr>
+              <a:buSzPct val="85000"/>
+              <a:buFont typeface="Arial"/>
+              <a:buChar char="–"/>
+            </a:pPr>
+            <a:r>
+              <a:rPr sz="1600" b="0">
+                <a:solidFill>
+                  <a:srgbClr val="333A42"/>
+                </a:solidFill>
+                <a:latin typeface="Calibri"/>
               </a:rPr>
               <a:t>3,403x at n = 100,000</a:t>
             </a:r>
@@ -4667,7 +5465,7 @@
       </p:sp>
       <p:pic>
         <p:nvPicPr>
-          <p:cNvPr id="4" name="Picture 3" descr="low_stock.png"/>
+          <p:cNvPr id="8" name="Picture 7" descr="low_stock.png"/>
           <p:cNvPicPr>
             <a:picLocks noChangeAspect="1"/>
           </p:cNvPicPr>
@@ -4681,8 +5479,8 @@
         </p:blipFill>
         <p:spPr>
           <a:xfrm>
-            <a:off x="4663440" y="1463040"/>
-            <a:ext cx="4206240" cy="2704011"/>
+            <a:off x="5623560" y="1884970"/>
+            <a:ext cx="5742432" cy="3691563"/>
           </a:xfrm>
           <a:prstGeom prst="rect">
             <a:avLst/>
@@ -4715,8 +5513,8 @@
         </p:nvSpPr>
         <p:spPr>
           <a:xfrm>
-            <a:off x="457200" y="320040"/>
-            <a:ext cx="8229600" cy="914400"/>
+            <a:off x="822960" y="475488"/>
+            <a:ext cx="10545775" cy="658368"/>
           </a:xfrm>
           <a:prstGeom prst="rect">
             <a:avLst/>
@@ -4724,16 +5522,25 @@
           <a:noFill/>
         </p:spPr>
         <p:txBody>
-          <a:bodyPr wrap="none">
+          <a:bodyPr wrap="square" anchor="t" lIns="0" rIns="0" tIns="0" bIns="0">
             <a:spAutoFit/>
           </a:bodyPr>
           <a:lstStyle/>
           <a:p>
-            <a:r>
-              <a:rPr sz="3000" b="1">
+            <a:pPr>
+              <a:spcBef>
+                <a:spcPts val="0"/>
+              </a:spcBef>
+              <a:spcAft>
+                <a:spcPts val="0"/>
+              </a:spcAft>
+            </a:pPr>
+            <a:r>
+              <a:rPr sz="2800" b="1">
                 <a:solidFill>
                   <a:srgbClr val="1F364D"/>
                 </a:solidFill>
+                <a:latin typeface="Calibri"/>
               </a:rPr>
               <a:t>Limitations and Future Work</a:t>
             </a:r>
@@ -4742,14 +5549,102 @@
       </p:sp>
       <p:sp>
         <p:nvSpPr>
-          <p:cNvPr id="3" name="TextBox 2"/>
+          <p:cNvPr id="3" name="Rectangle 2"/>
+          <p:cNvSpPr/>
+          <p:nvPr/>
+        </p:nvSpPr>
+        <p:spPr>
+          <a:xfrm>
+            <a:off x="822960" y="1170432"/>
+            <a:ext cx="1371600" cy="50292"/>
+          </a:xfrm>
+          <a:prstGeom prst="rect">
+            <a:avLst/>
+          </a:prstGeom>
+          <a:solidFill>
+            <a:srgbClr val="1E8E4F"/>
+          </a:solidFill>
+          <a:ln>
+            <a:noFill/>
+          </a:ln>
+          <a:effectLst/>
+        </p:spPr>
+        <p:style>
+          <a:lnRef idx="1">
+            <a:schemeClr val="accent1"/>
+          </a:lnRef>
+          <a:fillRef idx="3">
+            <a:schemeClr val="accent1"/>
+          </a:fillRef>
+          <a:effectRef idx="2">
+            <a:schemeClr val="accent1"/>
+          </a:effectRef>
+          <a:fontRef idx="minor">
+            <a:schemeClr val="lt1"/>
+          </a:fontRef>
+        </p:style>
+        <p:txBody>
+          <a:bodyPr rtlCol="0" anchor="ctr"/>
+          <a:lstStyle/>
+          <a:p>
+            <a:pPr algn="ctr"/>
+          </a:p>
+        </p:txBody>
+      </p:sp>
+      <p:sp>
+        <p:nvSpPr>
+          <p:cNvPr id="4" name="Rectangle 3"/>
+          <p:cNvSpPr/>
+          <p:nvPr/>
+        </p:nvSpPr>
+        <p:spPr>
+          <a:xfrm>
+            <a:off x="822960" y="6089904"/>
+            <a:ext cx="10545775" cy="10972"/>
+          </a:xfrm>
+          <a:prstGeom prst="rect">
+            <a:avLst/>
+          </a:prstGeom>
+          <a:solidFill>
+            <a:srgbClr val="D8DCE1"/>
+          </a:solidFill>
+          <a:ln>
+            <a:noFill/>
+          </a:ln>
+          <a:effectLst/>
+        </p:spPr>
+        <p:style>
+          <a:lnRef idx="1">
+            <a:schemeClr val="accent1"/>
+          </a:lnRef>
+          <a:fillRef idx="3">
+            <a:schemeClr val="accent1"/>
+          </a:fillRef>
+          <a:effectRef idx="2">
+            <a:schemeClr val="accent1"/>
+          </a:effectRef>
+          <a:fontRef idx="minor">
+            <a:schemeClr val="lt1"/>
+          </a:fontRef>
+        </p:style>
+        <p:txBody>
+          <a:bodyPr rtlCol="0" anchor="ctr"/>
+          <a:lstStyle/>
+          <a:p>
+            <a:pPr algn="ctr"/>
+          </a:p>
+        </p:txBody>
+      </p:sp>
+      <p:sp>
+        <p:nvSpPr>
+          <p:cNvPr id="5" name="TextBox 4"/>
           <p:cNvSpPr txBox="1"/>
           <p:nvPr/>
         </p:nvSpPr>
         <p:spPr>
           <a:xfrm>
-            <a:off x="640080" y="1371600"/>
-            <a:ext cx="7863840" cy="4846320"/>
+            <a:off x="822960" y="6236208"/>
+            <a:ext cx="9814255" cy="256032"/>
           </a:xfrm>
           <a:prstGeom prst="rect">
             <a:avLst/>
@@ -4757,98 +5652,288 @@
           <a:noFill/>
         </p:spPr>
         <p:txBody>
-          <a:bodyPr wrap="square">
+          <a:bodyPr wrap="square" anchor="t" lIns="0" rIns="0" tIns="0" bIns="0">
             <a:spAutoFit/>
           </a:bodyPr>
           <a:lstStyle/>
           <a:p>
             <a:pPr>
-              <a:spcAft>
-                <a:spcPts val="1000"/>
-              </a:spcAft>
-            </a:pPr>
-            <a:r>
-              <a:rPr sz="2000">
+              <a:spcBef>
+                <a:spcPts val="0"/>
+              </a:spcBef>
+              <a:spcAft>
+                <a:spcPts val="0"/>
+              </a:spcAft>
+            </a:pPr>
+            <a:r>
+              <a:rPr sz="1000" b="0">
+                <a:solidFill>
+                  <a:srgbClr val="6B727B"/>
+                </a:solidFill>
+                <a:latin typeface="Calibri"/>
+              </a:rPr>
+              <a:t>Rahul Solanki  |  MSCS-532-B01  |  Dynamic Inventory Management</a:t>
+            </a:r>
+          </a:p>
+        </p:txBody>
+      </p:sp>
+      <p:sp>
+        <p:nvSpPr>
+          <p:cNvPr id="6" name="TextBox 5"/>
+          <p:cNvSpPr txBox="1"/>
+          <p:nvPr/>
+        </p:nvSpPr>
+        <p:spPr>
+          <a:xfrm>
+            <a:off x="10637215" y="6236208"/>
+            <a:ext cx="731520" cy="256032"/>
+          </a:xfrm>
+          <a:prstGeom prst="rect">
+            <a:avLst/>
+          </a:prstGeom>
+          <a:noFill/>
+        </p:spPr>
+        <p:txBody>
+          <a:bodyPr wrap="square" anchor="t" lIns="0" rIns="0" tIns="0" bIns="0">
+            <a:spAutoFit/>
+          </a:bodyPr>
+          <a:lstStyle/>
+          <a:p>
+            <a:pPr algn="r">
+              <a:spcBef>
+                <a:spcPts val="0"/>
+              </a:spcBef>
+              <a:spcAft>
+                <a:spcPts val="0"/>
+              </a:spcAft>
+            </a:pPr>
+            <a:r>
+              <a:rPr sz="1000" b="0">
+                <a:solidFill>
+                  <a:srgbClr val="6B727B"/>
+                </a:solidFill>
+                <a:latin typeface="Calibri"/>
+              </a:rPr>
+              <a:t>12</a:t>
+            </a:r>
+          </a:p>
+        </p:txBody>
+      </p:sp>
+      <p:sp>
+        <p:nvSpPr>
+          <p:cNvPr id="7" name="TextBox 6"/>
+          <p:cNvSpPr txBox="1"/>
+          <p:nvPr/>
+        </p:nvSpPr>
+        <p:spPr>
+          <a:xfrm>
+            <a:off x="822960" y="1536192"/>
+            <a:ext cx="10545775" cy="4389120"/>
+          </a:xfrm>
+          <a:prstGeom prst="rect">
+            <a:avLst/>
+          </a:prstGeom>
+          <a:noFill/>
+        </p:spPr>
+        <p:txBody>
+          <a:bodyPr wrap="square" anchor="ctr" lIns="0" rIns="0" tIns="0" bIns="0">
+            <a:spAutoFit/>
+          </a:bodyPr>
+          <a:lstStyle/>
+          <a:p>
+            <a:pPr marL="274320" indent="-274320">
+              <a:lnSpc>
+                <a:spcPct val="105000"/>
+              </a:lnSpc>
+              <a:spcBef>
+                <a:spcPts val="0"/>
+              </a:spcBef>
+              <a:spcAft>
+                <a:spcPts val="300"/>
+              </a:spcAft>
+              <a:buClr>
+                <a:srgbClr val="1E8E4F"/>
+              </a:buClr>
+              <a:buSzPct val="85000"/>
+              <a:buFont typeface="Arial"/>
+              <a:buChar char="▪"/>
+            </a:pPr>
+            <a:r>
+              <a:rPr sz="2000" b="0">
                 <a:solidFill>
                   <a:srgbClr val="1F364D"/>
                 </a:solidFill>
+                <a:latin typeface="Calibri"/>
               </a:rPr>
               <a:t>Sorted-array writes are O(n)</a:t>
             </a:r>
           </a:p>
           <a:p>
-            <a:pPr lvl="1">
-              <a:spcAft>
-                <a:spcPts val="1000"/>
-              </a:spcAft>
-            </a:pPr>
-            <a:r>
-              <a:rPr sz="1600">
-                <a:solidFill>
-                  <a:srgbClr val="444444"/>
-                </a:solidFill>
+            <a:pPr marL="676656" indent="-256032">
+              <a:lnSpc>
+                <a:spcPct val="105000"/>
+              </a:lnSpc>
+              <a:spcBef>
+                <a:spcPts val="500"/>
+              </a:spcBef>
+              <a:spcAft>
+                <a:spcPts val="300"/>
+              </a:spcAft>
+              <a:buClr>
+                <a:srgbClr val="6B727B"/>
+              </a:buClr>
+              <a:buSzPct val="85000"/>
+              <a:buFont typeface="Arial"/>
+              <a:buChar char="–"/>
+            </a:pPr>
+            <a:r>
+              <a:rPr sz="1600" b="0">
+                <a:solidFill>
+                  <a:srgbClr val="333A42"/>
+                </a:solidFill>
+                <a:latin typeface="Calibri"/>
               </a:rPr>
               <a:t>B-tree / LSM-style index if price churn dominates</a:t>
             </a:r>
           </a:p>
           <a:p>
-            <a:pPr>
-              <a:spcAft>
-                <a:spcPts val="1000"/>
-              </a:spcAft>
-            </a:pPr>
-            <a:r>
-              <a:rPr sz="2000">
+            <a:pPr marL="274320" indent="-274320">
+              <a:lnSpc>
+                <a:spcPct val="105000"/>
+              </a:lnSpc>
+              <a:spcBef>
+                <a:spcPts val="1300"/>
+              </a:spcBef>
+              <a:spcAft>
+                <a:spcPts val="300"/>
+              </a:spcAft>
+              <a:buClr>
+                <a:srgbClr val="1E8E4F"/>
+              </a:buClr>
+              <a:buSzPct val="85000"/>
+              <a:buFont typeface="Arial"/>
+              <a:buChar char="▪"/>
+            </a:pPr>
+            <a:r>
+              <a:rPr sz="2000" b="0">
                 <a:solidFill>
                   <a:srgbClr val="1F364D"/>
                 </a:solidFill>
+                <a:latin typeface="Calibri"/>
               </a:rPr>
               <a:t>Cache helps only skewed traffic</a:t>
             </a:r>
           </a:p>
           <a:p>
-            <a:pPr>
-              <a:spcAft>
-                <a:spcPts val="1000"/>
-              </a:spcAft>
-            </a:pPr>
-            <a:r>
-              <a:rPr sz="2000">
+            <a:pPr marL="274320" indent="-274320">
+              <a:lnSpc>
+                <a:spcPct val="105000"/>
+              </a:lnSpc>
+              <a:spcBef>
+                <a:spcPts val="1300"/>
+              </a:spcBef>
+              <a:spcAft>
+                <a:spcPts val="300"/>
+              </a:spcAft>
+              <a:buClr>
+                <a:srgbClr val="1E8E4F"/>
+              </a:buClr>
+              <a:buSzPct val="85000"/>
+              <a:buFont typeface="Arial"/>
+              <a:buChar char="▪"/>
+            </a:pPr>
+            <a:r>
+              <a:rPr sz="2000" b="0">
                 <a:solidFill>
                   <a:srgbClr val="1F364D"/>
                 </a:solidFill>
+                <a:latin typeface="Calibri"/>
               </a:rPr>
               <a:t>Single-process, in-memory; synthetic workloads</a:t>
             </a:r>
           </a:p>
           <a:p>
-            <a:pPr>
-              <a:spcAft>
-                <a:spcPts val="1000"/>
-              </a:spcAft>
-            </a:pPr>
-            <a:r>
-              <a:rPr sz="2000">
+            <a:pPr marL="274320" indent="-274320">
+              <a:lnSpc>
+                <a:spcPct val="105000"/>
+              </a:lnSpc>
+              <a:spcBef>
+                <a:spcPts val="1300"/>
+              </a:spcBef>
+              <a:spcAft>
+                <a:spcPts val="300"/>
+              </a:spcAft>
+              <a:buClr>
+                <a:srgbClr val="1E8E4F"/>
+              </a:buClr>
+              <a:buSzPct val="85000"/>
+              <a:buFont typeface="Arial"/>
+              <a:buChar char="▪"/>
+            </a:pPr>
+            <a:r>
+              <a:rPr sz="2000" b="0">
                 <a:solidFill>
                   <a:srgbClr val="1F364D"/>
                 </a:solidFill>
-              </a:rPr>
-              <a:t>Future: persistence, concurrency, production traces,</a:t>
-            </a:r>
-          </a:p>
-          <a:p>
-            <a:pPr lvl="1">
-              <a:spcAft>
-                <a:spcPts val="1000"/>
-              </a:spcAft>
-            </a:pPr>
-            <a:r>
-              <a:rPr sz="1600">
-                <a:solidFill>
-                  <a:srgbClr val="444444"/>
-                </a:solidFill>
-              </a:rPr>
-              <a:t>C extensions for remaining hot loops</a:t>
+                <a:latin typeface="Calibri"/>
+              </a:rPr>
+              <a:t>Future work follows from each limitation</a:t>
+            </a:r>
+          </a:p>
+          <a:p>
+            <a:pPr marL="676656" indent="-256032">
+              <a:lnSpc>
+                <a:spcPct val="105000"/>
+              </a:lnSpc>
+              <a:spcBef>
+                <a:spcPts val="500"/>
+              </a:spcBef>
+              <a:spcAft>
+                <a:spcPts val="300"/>
+              </a:spcAft>
+              <a:buClr>
+                <a:srgbClr val="6B727B"/>
+              </a:buClr>
+              <a:buSzPct val="85000"/>
+              <a:buFont typeface="Arial"/>
+              <a:buChar char="–"/>
+            </a:pPr>
+            <a:r>
+              <a:rPr sz="1600" b="0">
+                <a:solidFill>
+                  <a:srgbClr val="333A42"/>
+                </a:solidFill>
+                <a:latin typeface="Calibri"/>
+              </a:rPr>
+              <a:t>Persistence (write-ahead logging), concurrency</a:t>
+            </a:r>
+          </a:p>
+          <a:p>
+            <a:pPr marL="676656" indent="-256032">
+              <a:lnSpc>
+                <a:spcPct val="105000"/>
+              </a:lnSpc>
+              <a:spcBef>
+                <a:spcPts val="500"/>
+              </a:spcBef>
+              <a:spcAft>
+                <a:spcPts val="300"/>
+              </a:spcAft>
+              <a:buClr>
+                <a:srgbClr val="6B727B"/>
+              </a:buClr>
+              <a:buSzPct val="85000"/>
+              <a:buFont typeface="Arial"/>
+              <a:buChar char="–"/>
+            </a:pPr>
+            <a:r>
+              <a:rPr sz="1600" b="0">
+                <a:solidFill>
+                  <a:srgbClr val="333A42"/>
+                </a:solidFill>
+                <a:latin typeface="Calibri"/>
+              </a:rPr>
+              <a:t>Production traces; C extensions for hot loops</a:t>
             </a:r>
           </a:p>
         </p:txBody>
@@ -4879,8 +5964,8 @@
         </p:nvSpPr>
         <p:spPr>
           <a:xfrm>
-            <a:off x="457200" y="320040"/>
-            <a:ext cx="8229600" cy="914400"/>
+            <a:off x="822960" y="475488"/>
+            <a:ext cx="10545775" cy="658368"/>
           </a:xfrm>
           <a:prstGeom prst="rect">
             <a:avLst/>
@@ -4888,16 +5973,25 @@
           <a:noFill/>
         </p:spPr>
         <p:txBody>
-          <a:bodyPr wrap="none">
+          <a:bodyPr wrap="square" anchor="t" lIns="0" rIns="0" tIns="0" bIns="0">
             <a:spAutoFit/>
           </a:bodyPr>
           <a:lstStyle/>
           <a:p>
-            <a:r>
-              <a:rPr sz="3000" b="1">
+            <a:pPr>
+              <a:spcBef>
+                <a:spcPts val="0"/>
+              </a:spcBef>
+              <a:spcAft>
+                <a:spcPts val="0"/>
+              </a:spcAft>
+            </a:pPr>
+            <a:r>
+              <a:rPr sz="2800" b="1">
                 <a:solidFill>
                   <a:srgbClr val="1F364D"/>
                 </a:solidFill>
+                <a:latin typeface="Calibri"/>
               </a:rPr>
               <a:t>Conclusion</a:t>
             </a:r>
@@ -4906,14 +6000,102 @@
       </p:sp>
       <p:sp>
         <p:nvSpPr>
-          <p:cNvPr id="3" name="TextBox 2"/>
+          <p:cNvPr id="3" name="Rectangle 2"/>
+          <p:cNvSpPr/>
+          <p:nvPr/>
+        </p:nvSpPr>
+        <p:spPr>
+          <a:xfrm>
+            <a:off x="822960" y="1170432"/>
+            <a:ext cx="1371600" cy="50292"/>
+          </a:xfrm>
+          <a:prstGeom prst="rect">
+            <a:avLst/>
+          </a:prstGeom>
+          <a:solidFill>
+            <a:srgbClr val="1E8E4F"/>
+          </a:solidFill>
+          <a:ln>
+            <a:noFill/>
+          </a:ln>
+          <a:effectLst/>
+        </p:spPr>
+        <p:style>
+          <a:lnRef idx="1">
+            <a:schemeClr val="accent1"/>
+          </a:lnRef>
+          <a:fillRef idx="3">
+            <a:schemeClr val="accent1"/>
+          </a:fillRef>
+          <a:effectRef idx="2">
+            <a:schemeClr val="accent1"/>
+          </a:effectRef>
+          <a:fontRef idx="minor">
+            <a:schemeClr val="lt1"/>
+          </a:fontRef>
+        </p:style>
+        <p:txBody>
+          <a:bodyPr rtlCol="0" anchor="ctr"/>
+          <a:lstStyle/>
+          <a:p>
+            <a:pPr algn="ctr"/>
+          </a:p>
+        </p:txBody>
+      </p:sp>
+      <p:sp>
+        <p:nvSpPr>
+          <p:cNvPr id="4" name="Rectangle 3"/>
+          <p:cNvSpPr/>
+          <p:nvPr/>
+        </p:nvSpPr>
+        <p:spPr>
+          <a:xfrm>
+            <a:off x="822960" y="6089904"/>
+            <a:ext cx="10545775" cy="10972"/>
+          </a:xfrm>
+          <a:prstGeom prst="rect">
+            <a:avLst/>
+          </a:prstGeom>
+          <a:solidFill>
+            <a:srgbClr val="D8DCE1"/>
+          </a:solidFill>
+          <a:ln>
+            <a:noFill/>
+          </a:ln>
+          <a:effectLst/>
+        </p:spPr>
+        <p:style>
+          <a:lnRef idx="1">
+            <a:schemeClr val="accent1"/>
+          </a:lnRef>
+          <a:fillRef idx="3">
+            <a:schemeClr val="accent1"/>
+          </a:fillRef>
+          <a:effectRef idx="2">
+            <a:schemeClr val="accent1"/>
+          </a:effectRef>
+          <a:fontRef idx="minor">
+            <a:schemeClr val="lt1"/>
+          </a:fontRef>
+        </p:style>
+        <p:txBody>
+          <a:bodyPr rtlCol="0" anchor="ctr"/>
+          <a:lstStyle/>
+          <a:p>
+            <a:pPr algn="ctr"/>
+          </a:p>
+        </p:txBody>
+      </p:sp>
+      <p:sp>
+        <p:nvSpPr>
+          <p:cNvPr id="5" name="TextBox 4"/>
           <p:cNvSpPr txBox="1"/>
           <p:nvPr/>
         </p:nvSpPr>
         <p:spPr>
           <a:xfrm>
-            <a:off x="640080" y="1371600"/>
-            <a:ext cx="7863840" cy="4846320"/>
+            <a:off x="822960" y="6236208"/>
+            <a:ext cx="9814255" cy="256032"/>
           </a:xfrm>
           <a:prstGeom prst="rect">
             <a:avLst/>
@@ -4921,96 +6103,258 @@
           <a:noFill/>
         </p:spPr>
         <p:txBody>
-          <a:bodyPr wrap="square">
+          <a:bodyPr wrap="square" anchor="t" lIns="0" rIns="0" tIns="0" bIns="0">
             <a:spAutoFit/>
           </a:bodyPr>
           <a:lstStyle/>
           <a:p>
             <a:pPr>
-              <a:spcAft>
-                <a:spcPts val="1000"/>
-              </a:spcAft>
-            </a:pPr>
-            <a:r>
-              <a:rPr sz="2000">
+              <a:spcBef>
+                <a:spcPts val="0"/>
+              </a:spcBef>
+              <a:spcAft>
+                <a:spcPts val="0"/>
+              </a:spcAft>
+            </a:pPr>
+            <a:r>
+              <a:rPr sz="1000" b="0">
+                <a:solidFill>
+                  <a:srgbClr val="6B727B"/>
+                </a:solidFill>
+                <a:latin typeface="Calibri"/>
+              </a:rPr>
+              <a:t>Rahul Solanki  |  MSCS-532-B01  |  Dynamic Inventory Management</a:t>
+            </a:r>
+          </a:p>
+        </p:txBody>
+      </p:sp>
+      <p:sp>
+        <p:nvSpPr>
+          <p:cNvPr id="6" name="TextBox 5"/>
+          <p:cNvSpPr txBox="1"/>
+          <p:nvPr/>
+        </p:nvSpPr>
+        <p:spPr>
+          <a:xfrm>
+            <a:off x="10637215" y="6236208"/>
+            <a:ext cx="731520" cy="256032"/>
+          </a:xfrm>
+          <a:prstGeom prst="rect">
+            <a:avLst/>
+          </a:prstGeom>
+          <a:noFill/>
+        </p:spPr>
+        <p:txBody>
+          <a:bodyPr wrap="square" anchor="t" lIns="0" rIns="0" tIns="0" bIns="0">
+            <a:spAutoFit/>
+          </a:bodyPr>
+          <a:lstStyle/>
+          <a:p>
+            <a:pPr algn="r">
+              <a:spcBef>
+                <a:spcPts val="0"/>
+              </a:spcBef>
+              <a:spcAft>
+                <a:spcPts val="0"/>
+              </a:spcAft>
+            </a:pPr>
+            <a:r>
+              <a:rPr sz="1000" b="0">
+                <a:solidFill>
+                  <a:srgbClr val="6B727B"/>
+                </a:solidFill>
+                <a:latin typeface="Calibri"/>
+              </a:rPr>
+              <a:t>13</a:t>
+            </a:r>
+          </a:p>
+        </p:txBody>
+      </p:sp>
+      <p:sp>
+        <p:nvSpPr>
+          <p:cNvPr id="7" name="TextBox 6"/>
+          <p:cNvSpPr txBox="1"/>
+          <p:nvPr/>
+        </p:nvSpPr>
+        <p:spPr>
+          <a:xfrm>
+            <a:off x="822960" y="1536192"/>
+            <a:ext cx="10545775" cy="4389120"/>
+          </a:xfrm>
+          <a:prstGeom prst="rect">
+            <a:avLst/>
+          </a:prstGeom>
+          <a:noFill/>
+        </p:spPr>
+        <p:txBody>
+          <a:bodyPr wrap="square" anchor="ctr" lIns="0" rIns="0" tIns="0" bIns="0">
+            <a:spAutoFit/>
+          </a:bodyPr>
+          <a:lstStyle/>
+          <a:p>
+            <a:pPr marL="274320" indent="-274320">
+              <a:lnSpc>
+                <a:spcPct val="105000"/>
+              </a:lnSpc>
+              <a:spcBef>
+                <a:spcPts val="0"/>
+              </a:spcBef>
+              <a:spcAft>
+                <a:spcPts val="300"/>
+              </a:spcAft>
+              <a:buClr>
+                <a:srgbClr val="1E8E4F"/>
+              </a:buClr>
+              <a:buSzPct val="85000"/>
+              <a:buFont typeface="Arial"/>
+              <a:buChar char="▪"/>
+            </a:pPr>
+            <a:r>
+              <a:rPr sz="2000" b="0">
                 <a:solidFill>
                   <a:srgbClr val="1F364D"/>
                 </a:solidFill>
+                <a:latin typeface="Calibri"/>
               </a:rPr>
               <a:t>Theory chooses the structure; measurement validates it</a:t>
             </a:r>
           </a:p>
           <a:p>
-            <a:pPr>
-              <a:spcAft>
-                <a:spcPts val="1000"/>
-              </a:spcAft>
-            </a:pPr>
-            <a:r>
-              <a:rPr sz="2000">
+            <a:pPr marL="274320" indent="-274320">
+              <a:lnSpc>
+                <a:spcPct val="105000"/>
+              </a:lnSpc>
+              <a:spcBef>
+                <a:spcPts val="1300"/>
+              </a:spcBef>
+              <a:spcAft>
+                <a:spcPts val="300"/>
+              </a:spcAft>
+              <a:buClr>
+                <a:srgbClr val="1E8E4F"/>
+              </a:buClr>
+              <a:buSzPct val="85000"/>
+              <a:buFont typeface="Arial"/>
+              <a:buChar char="▪"/>
+            </a:pPr>
+            <a:r>
+              <a:rPr sz="2000" b="0">
                 <a:solidFill>
                   <a:srgbClr val="1F364D"/>
                 </a:solidFill>
+                <a:latin typeface="Calibri"/>
               </a:rPr>
               <a:t>Asymptotic fixes: gains that grow with n</a:t>
             </a:r>
           </a:p>
           <a:p>
-            <a:pPr>
-              <a:spcAft>
-                <a:spcPts val="1000"/>
-              </a:spcAft>
-            </a:pPr>
-            <a:r>
-              <a:rPr sz="2000">
+            <a:pPr marL="274320" indent="-274320">
+              <a:lnSpc>
+                <a:spcPct val="105000"/>
+              </a:lnSpc>
+              <a:spcBef>
+                <a:spcPts val="1300"/>
+              </a:spcBef>
+              <a:spcAft>
+                <a:spcPts val="300"/>
+              </a:spcAft>
+              <a:buClr>
+                <a:srgbClr val="1E8E4F"/>
+              </a:buClr>
+              <a:buSzPct val="85000"/>
+              <a:buFont typeface="Arial"/>
+              <a:buChar char="▪"/>
+            </a:pPr>
+            <a:r>
+              <a:rPr sz="2000" b="0">
                 <a:solidFill>
                   <a:srgbClr val="1F364D"/>
                 </a:solidFill>
+                <a:latin typeface="Calibri"/>
               </a:rPr>
               <a:t>Constant-factor fixes: steady, workload-dependent gains</a:t>
             </a:r>
           </a:p>
           <a:p>
-            <a:pPr>
-              <a:spcAft>
-                <a:spcPts val="1000"/>
-              </a:spcAft>
-            </a:pPr>
-            <a:r>
-              <a:rPr sz="2000">
+            <a:pPr marL="274320" indent="-274320">
+              <a:lnSpc>
+                <a:spcPct val="105000"/>
+              </a:lnSpc>
+              <a:spcBef>
+                <a:spcPts val="1300"/>
+              </a:spcBef>
+              <a:spcAft>
+                <a:spcPts val="300"/>
+              </a:spcAft>
+              <a:buClr>
+                <a:srgbClr val="1E8E4F"/>
+              </a:buClr>
+              <a:buSzPct val="85000"/>
+              <a:buFont typeface="Arial"/>
+              <a:buChar char="▪"/>
+            </a:pPr>
+            <a:r>
+              <a:rPr sz="2000" b="0">
                 <a:solidFill>
                   <a:srgbClr val="1F364D"/>
                 </a:solidFill>
+                <a:latin typeface="Calibri"/>
               </a:rPr>
               <a:t>Contract tests made optimization safe</a:t>
             </a:r>
           </a:p>
           <a:p>
-            <a:pPr>
-              <a:spcAft>
-                <a:spcPts val="1000"/>
-              </a:spcAft>
-            </a:pPr>
-            <a:r>
-              <a:rPr sz="2000">
+            <a:pPr marL="274320" indent="-274320">
+              <a:lnSpc>
+                <a:spcPct val="105000"/>
+              </a:lnSpc>
+              <a:spcBef>
+                <a:spcPts val="1300"/>
+              </a:spcBef>
+              <a:spcAft>
+                <a:spcPts val="300"/>
+              </a:spcAft>
+              <a:buClr>
+                <a:srgbClr val="1E8E4F"/>
+              </a:buClr>
+              <a:buSzPct val="85000"/>
+              <a:buFont typeface="Arial"/>
+              <a:buChar char="▪"/>
+            </a:pPr>
+            <a:r>
+              <a:rPr sz="2000" b="0">
                 <a:solidFill>
                   <a:srgbClr val="1F364D"/>
                 </a:solidFill>
+                <a:latin typeface="Calibri"/>
               </a:rPr>
               <a:t>Code, tests, benchmarks: https://github.com/iknalos/MSCS-532-Project-Deliverable-4</a:t>
             </a:r>
           </a:p>
           <a:p>
-            <a:pPr>
-              <a:spcAft>
-                <a:spcPts val="1000"/>
-              </a:spcAft>
-            </a:pPr>
-            <a:r>
-              <a:rPr sz="2000">
+            <a:pPr marL="274320" indent="-274320">
+              <a:lnSpc>
+                <a:spcPct val="105000"/>
+              </a:lnSpc>
+              <a:spcBef>
+                <a:spcPts val="1300"/>
+              </a:spcBef>
+              <a:spcAft>
+                <a:spcPts val="300"/>
+              </a:spcAft>
+              <a:buClr>
+                <a:srgbClr val="1E8E4F"/>
+              </a:buClr>
+              <a:buSzPct val="85000"/>
+              <a:buFont typeface="Arial"/>
+              <a:buChar char="▪"/>
+            </a:pPr>
+            <a:r>
+              <a:rPr sz="2000" b="0">
                 <a:solidFill>
                   <a:srgbClr val="1F364D"/>
                 </a:solidFill>
+                <a:latin typeface="Calibri"/>
               </a:rPr>
               <a:t>Questions?</a:t>
             </a:r>
@@ -5043,8 +6387,8 @@
         </p:nvSpPr>
         <p:spPr>
           <a:xfrm>
-            <a:off x="457200" y="320040"/>
-            <a:ext cx="8229600" cy="914400"/>
+            <a:off x="822960" y="475488"/>
+            <a:ext cx="10545775" cy="658368"/>
           </a:xfrm>
           <a:prstGeom prst="rect">
             <a:avLst/>
@@ -5052,16 +6396,25 @@
           <a:noFill/>
         </p:spPr>
         <p:txBody>
-          <a:bodyPr wrap="none">
+          <a:bodyPr wrap="square" anchor="t" lIns="0" rIns="0" tIns="0" bIns="0">
             <a:spAutoFit/>
           </a:bodyPr>
           <a:lstStyle/>
           <a:p>
-            <a:r>
-              <a:rPr sz="3000" b="1">
+            <a:pPr>
+              <a:spcBef>
+                <a:spcPts val="0"/>
+              </a:spcBef>
+              <a:spcAft>
+                <a:spcPts val="0"/>
+              </a:spcAft>
+            </a:pPr>
+            <a:r>
+              <a:rPr sz="2800" b="1">
                 <a:solidFill>
                   <a:srgbClr val="1F364D"/>
                 </a:solidFill>
+                <a:latin typeface="Calibri"/>
               </a:rPr>
               <a:t>The Problem: Dynamic Inventory</a:t>
             </a:r>
@@ -5070,14 +6423,102 @@
       </p:sp>
       <p:sp>
         <p:nvSpPr>
-          <p:cNvPr id="3" name="TextBox 2"/>
+          <p:cNvPr id="3" name="Rectangle 2"/>
+          <p:cNvSpPr/>
+          <p:nvPr/>
+        </p:nvSpPr>
+        <p:spPr>
+          <a:xfrm>
+            <a:off x="822960" y="1170432"/>
+            <a:ext cx="1371600" cy="50292"/>
+          </a:xfrm>
+          <a:prstGeom prst="rect">
+            <a:avLst/>
+          </a:prstGeom>
+          <a:solidFill>
+            <a:srgbClr val="1E8E4F"/>
+          </a:solidFill>
+          <a:ln>
+            <a:noFill/>
+          </a:ln>
+          <a:effectLst/>
+        </p:spPr>
+        <p:style>
+          <a:lnRef idx="1">
+            <a:schemeClr val="accent1"/>
+          </a:lnRef>
+          <a:fillRef idx="3">
+            <a:schemeClr val="accent1"/>
+          </a:fillRef>
+          <a:effectRef idx="2">
+            <a:schemeClr val="accent1"/>
+          </a:effectRef>
+          <a:fontRef idx="minor">
+            <a:schemeClr val="lt1"/>
+          </a:fontRef>
+        </p:style>
+        <p:txBody>
+          <a:bodyPr rtlCol="0" anchor="ctr"/>
+          <a:lstStyle/>
+          <a:p>
+            <a:pPr algn="ctr"/>
+          </a:p>
+        </p:txBody>
+      </p:sp>
+      <p:sp>
+        <p:nvSpPr>
+          <p:cNvPr id="4" name="Rectangle 3"/>
+          <p:cNvSpPr/>
+          <p:nvPr/>
+        </p:nvSpPr>
+        <p:spPr>
+          <a:xfrm>
+            <a:off x="822960" y="6089904"/>
+            <a:ext cx="10545775" cy="10972"/>
+          </a:xfrm>
+          <a:prstGeom prst="rect">
+            <a:avLst/>
+          </a:prstGeom>
+          <a:solidFill>
+            <a:srgbClr val="D8DCE1"/>
+          </a:solidFill>
+          <a:ln>
+            <a:noFill/>
+          </a:ln>
+          <a:effectLst/>
+        </p:spPr>
+        <p:style>
+          <a:lnRef idx="1">
+            <a:schemeClr val="accent1"/>
+          </a:lnRef>
+          <a:fillRef idx="3">
+            <a:schemeClr val="accent1"/>
+          </a:fillRef>
+          <a:effectRef idx="2">
+            <a:schemeClr val="accent1"/>
+          </a:effectRef>
+          <a:fontRef idx="minor">
+            <a:schemeClr val="lt1"/>
+          </a:fontRef>
+        </p:style>
+        <p:txBody>
+          <a:bodyPr rtlCol="0" anchor="ctr"/>
+          <a:lstStyle/>
+          <a:p>
+            <a:pPr algn="ctr"/>
+          </a:p>
+        </p:txBody>
+      </p:sp>
+      <p:sp>
+        <p:nvSpPr>
+          <p:cNvPr id="5" name="TextBox 4"/>
           <p:cNvSpPr txBox="1"/>
           <p:nvPr/>
         </p:nvSpPr>
         <p:spPr>
           <a:xfrm>
-            <a:off x="640080" y="1371600"/>
-            <a:ext cx="7863840" cy="4846320"/>
+            <a:off x="822960" y="6236208"/>
+            <a:ext cx="9814255" cy="256032"/>
           </a:xfrm>
           <a:prstGeom prst="rect">
             <a:avLst/>
@@ -5085,141 +6526,342 @@
           <a:noFill/>
         </p:spPr>
         <p:txBody>
-          <a:bodyPr wrap="square">
+          <a:bodyPr wrap="square" anchor="t" lIns="0" rIns="0" tIns="0" bIns="0">
             <a:spAutoFit/>
           </a:bodyPr>
           <a:lstStyle/>
           <a:p>
             <a:pPr>
-              <a:spcAft>
-                <a:spcPts val="1000"/>
-              </a:spcAft>
-            </a:pPr>
-            <a:r>
-              <a:rPr sz="2000">
+              <a:spcBef>
+                <a:spcPts val="0"/>
+              </a:spcBef>
+              <a:spcAft>
+                <a:spcPts val="0"/>
+              </a:spcAft>
+            </a:pPr>
+            <a:r>
+              <a:rPr sz="1000" b="0">
+                <a:solidFill>
+                  <a:srgbClr val="6B727B"/>
+                </a:solidFill>
+                <a:latin typeface="Calibri"/>
+              </a:rPr>
+              <a:t>Rahul Solanki  |  MSCS-532-B01  |  Dynamic Inventory Management</a:t>
+            </a:r>
+          </a:p>
+        </p:txBody>
+      </p:sp>
+      <p:sp>
+        <p:nvSpPr>
+          <p:cNvPr id="6" name="TextBox 5"/>
+          <p:cNvSpPr txBox="1"/>
+          <p:nvPr/>
+        </p:nvSpPr>
+        <p:spPr>
+          <a:xfrm>
+            <a:off x="10637215" y="6236208"/>
+            <a:ext cx="731520" cy="256032"/>
+          </a:xfrm>
+          <a:prstGeom prst="rect">
+            <a:avLst/>
+          </a:prstGeom>
+          <a:noFill/>
+        </p:spPr>
+        <p:txBody>
+          <a:bodyPr wrap="square" anchor="t" lIns="0" rIns="0" tIns="0" bIns="0">
+            <a:spAutoFit/>
+          </a:bodyPr>
+          <a:lstStyle/>
+          <a:p>
+            <a:pPr algn="r">
+              <a:spcBef>
+                <a:spcPts val="0"/>
+              </a:spcBef>
+              <a:spcAft>
+                <a:spcPts val="0"/>
+              </a:spcAft>
+            </a:pPr>
+            <a:r>
+              <a:rPr sz="1000" b="0">
+                <a:solidFill>
+                  <a:srgbClr val="6B727B"/>
+                </a:solidFill>
+                <a:latin typeface="Calibri"/>
+              </a:rPr>
+              <a:t>2</a:t>
+            </a:r>
+          </a:p>
+        </p:txBody>
+      </p:sp>
+      <p:sp>
+        <p:nvSpPr>
+          <p:cNvPr id="7" name="TextBox 6"/>
+          <p:cNvSpPr txBox="1"/>
+          <p:nvPr/>
+        </p:nvSpPr>
+        <p:spPr>
+          <a:xfrm>
+            <a:off x="822960" y="1536192"/>
+            <a:ext cx="10545775" cy="4389120"/>
+          </a:xfrm>
+          <a:prstGeom prst="rect">
+            <a:avLst/>
+          </a:prstGeom>
+          <a:noFill/>
+        </p:spPr>
+        <p:txBody>
+          <a:bodyPr wrap="square" anchor="ctr" lIns="0" rIns="0" tIns="0" bIns="0">
+            <a:spAutoFit/>
+          </a:bodyPr>
+          <a:lstStyle/>
+          <a:p>
+            <a:pPr marL="274320" indent="-274320">
+              <a:lnSpc>
+                <a:spcPct val="105000"/>
+              </a:lnSpc>
+              <a:spcBef>
+                <a:spcPts val="0"/>
+              </a:spcBef>
+              <a:spcAft>
+                <a:spcPts val="300"/>
+              </a:spcAft>
+              <a:buClr>
+                <a:srgbClr val="1E8E4F"/>
+              </a:buClr>
+              <a:buSzPct val="85000"/>
+              <a:buFont typeface="Arial"/>
+              <a:buChar char="▪"/>
+            </a:pPr>
+            <a:r>
+              <a:rPr sz="2000" b="0">
                 <a:solidFill>
                   <a:srgbClr val="1F364D"/>
                 </a:solidFill>
+                <a:latin typeface="Calibri"/>
               </a:rPr>
               <a:t>E-commerce inventory changes continuously</a:t>
             </a:r>
           </a:p>
           <a:p>
-            <a:pPr lvl="1">
-              <a:spcAft>
-                <a:spcPts val="1000"/>
-              </a:spcAft>
-            </a:pPr>
-            <a:r>
-              <a:rPr sz="1600">
-                <a:solidFill>
-                  <a:srgbClr val="444444"/>
-                </a:solidFill>
+            <a:pPr marL="676656" indent="-256032">
+              <a:lnSpc>
+                <a:spcPct val="105000"/>
+              </a:lnSpc>
+              <a:spcBef>
+                <a:spcPts val="500"/>
+              </a:spcBef>
+              <a:spcAft>
+                <a:spcPts val="300"/>
+              </a:spcAft>
+              <a:buClr>
+                <a:srgbClr val="6B727B"/>
+              </a:buClr>
+              <a:buSzPct val="85000"/>
+              <a:buFont typeface="Arial"/>
+              <a:buChar char="–"/>
+            </a:pPr>
+            <a:r>
+              <a:rPr sz="1600" b="0">
+                <a:solidFill>
+                  <a:srgbClr val="333A42"/>
+                </a:solidFill>
+                <a:latin typeface="Calibri"/>
               </a:rPr>
               <a:t>Every sale and delivery moves a quantity</a:t>
             </a:r>
           </a:p>
           <a:p>
-            <a:pPr lvl="1">
-              <a:spcAft>
-                <a:spcPts val="1000"/>
-              </a:spcAft>
-            </a:pPr>
-            <a:r>
-              <a:rPr sz="1600">
-                <a:solidFill>
-                  <a:srgbClr val="444444"/>
-                </a:solidFill>
+            <a:pPr marL="676656" indent="-256032">
+              <a:lnSpc>
+                <a:spcPct val="105000"/>
+              </a:lnSpc>
+              <a:spcBef>
+                <a:spcPts val="500"/>
+              </a:spcBef>
+              <a:spcAft>
+                <a:spcPts val="300"/>
+              </a:spcAft>
+              <a:buClr>
+                <a:srgbClr val="6B727B"/>
+              </a:buClr>
+              <a:buSzPct val="85000"/>
+              <a:buFont typeface="Arial"/>
+              <a:buChar char="–"/>
+            </a:pPr>
+            <a:r>
+              <a:rPr sz="1600" b="0">
+                <a:solidFill>
+                  <a:srgbClr val="333A42"/>
+                </a:solidFill>
+                <a:latin typeface="Calibri"/>
               </a:rPr>
               <a:t>Prices move with promotions; products come and go</a:t>
             </a:r>
           </a:p>
           <a:p>
-            <a:pPr>
-              <a:spcAft>
-                <a:spcPts val="1000"/>
-              </a:spcAft>
-            </a:pPr>
-            <a:r>
-              <a:rPr sz="2000">
+            <a:pPr marL="274320" indent="-274320">
+              <a:lnSpc>
+                <a:spcPct val="105000"/>
+              </a:lnSpc>
+              <a:spcBef>
+                <a:spcPts val="1300"/>
+              </a:spcBef>
+              <a:spcAft>
+                <a:spcPts val="300"/>
+              </a:spcAft>
+              <a:buClr>
+                <a:srgbClr val="1E8E4F"/>
+              </a:buClr>
+              <a:buSzPct val="85000"/>
+              <a:buFont typeface="Arial"/>
+              <a:buChar char="▪"/>
+            </a:pPr>
+            <a:r>
+              <a:rPr sz="2000" b="0">
                 <a:solidFill>
                   <a:srgbClr val="1F364D"/>
                 </a:solidFill>
+                <a:latin typeface="Calibri"/>
               </a:rPr>
               <a:t>Four latency-sensitive query patterns</a:t>
             </a:r>
           </a:p>
           <a:p>
-            <a:pPr lvl="1">
-              <a:spcAft>
-                <a:spcPts val="1000"/>
-              </a:spcAft>
-            </a:pPr>
-            <a:r>
-              <a:rPr sz="1600">
-                <a:solidFill>
-                  <a:srgbClr val="444444"/>
-                </a:solidFill>
+            <a:pPr marL="676656" indent="-256032">
+              <a:lnSpc>
+                <a:spcPct val="105000"/>
+              </a:lnSpc>
+              <a:spcBef>
+                <a:spcPts val="500"/>
+              </a:spcBef>
+              <a:spcAft>
+                <a:spcPts val="300"/>
+              </a:spcAft>
+              <a:buClr>
+                <a:srgbClr val="6B727B"/>
+              </a:buClr>
+              <a:buSzPct val="85000"/>
+              <a:buFont typeface="Arial"/>
+              <a:buChar char="–"/>
+            </a:pPr>
+            <a:r>
+              <a:rPr sz="1600" b="0">
+                <a:solidFill>
+                  <a:srgbClr val="333A42"/>
+                </a:solidFill>
+                <a:latin typeface="Calibri"/>
               </a:rPr>
               <a:t>Exact SKU lookup</a:t>
             </a:r>
           </a:p>
           <a:p>
-            <a:pPr lvl="1">
-              <a:spcAft>
-                <a:spcPts val="1000"/>
-              </a:spcAft>
-            </a:pPr>
-            <a:r>
-              <a:rPr sz="1600">
-                <a:solidFill>
-                  <a:srgbClr val="444444"/>
-                </a:solidFill>
+            <a:pPr marL="676656" indent="-256032">
+              <a:lnSpc>
+                <a:spcPct val="105000"/>
+              </a:lnSpc>
+              <a:spcBef>
+                <a:spcPts val="500"/>
+              </a:spcBef>
+              <a:spcAft>
+                <a:spcPts val="300"/>
+              </a:spcAft>
+              <a:buClr>
+                <a:srgbClr val="6B727B"/>
+              </a:buClr>
+              <a:buSzPct val="85000"/>
+              <a:buFont typeface="Arial"/>
+              <a:buChar char="–"/>
+            </a:pPr>
+            <a:r>
+              <a:rPr sz="1600" b="0">
+                <a:solidFill>
+                  <a:srgbClr val="333A42"/>
+                </a:solidFill>
+                <a:latin typeface="Calibri"/>
               </a:rPr>
               <a:t>Low-stock alerts: the k scarcest products</a:t>
             </a:r>
           </a:p>
           <a:p>
-            <a:pPr lvl="1">
-              <a:spcAft>
-                <a:spcPts val="1000"/>
-              </a:spcAft>
-            </a:pPr>
-            <a:r>
-              <a:rPr sz="1600">
-                <a:solidFill>
-                  <a:srgbClr val="444444"/>
-                </a:solidFill>
+            <a:pPr marL="676656" indent="-256032">
+              <a:lnSpc>
+                <a:spcPct val="105000"/>
+              </a:lnSpc>
+              <a:spcBef>
+                <a:spcPts val="500"/>
+              </a:spcBef>
+              <a:spcAft>
+                <a:spcPts val="300"/>
+              </a:spcAft>
+              <a:buClr>
+                <a:srgbClr val="6B727B"/>
+              </a:buClr>
+              <a:buSzPct val="85000"/>
+              <a:buFont typeface="Arial"/>
+              <a:buChar char="–"/>
+            </a:pPr>
+            <a:r>
+              <a:rPr sz="1600" b="0">
+                <a:solidFill>
+                  <a:srgbClr val="333A42"/>
+                </a:solidFill>
+                <a:latin typeface="Calibri"/>
               </a:rPr>
               <a:t>Price-band queries for merchandising</a:t>
             </a:r>
           </a:p>
           <a:p>
-            <a:pPr lvl="1">
-              <a:spcAft>
-                <a:spcPts val="1000"/>
-              </a:spcAft>
-            </a:pPr>
-            <a:r>
-              <a:rPr sz="1600">
-                <a:solidFill>
-                  <a:srgbClr val="444444"/>
-                </a:solidFill>
+            <a:pPr marL="676656" indent="-256032">
+              <a:lnSpc>
+                <a:spcPct val="105000"/>
+              </a:lnSpc>
+              <a:spcBef>
+                <a:spcPts val="500"/>
+              </a:spcBef>
+              <a:spcAft>
+                <a:spcPts val="300"/>
+              </a:spcAft>
+              <a:buClr>
+                <a:srgbClr val="6B727B"/>
+              </a:buClr>
+              <a:buSzPct val="85000"/>
+              <a:buFont typeface="Arial"/>
+              <a:buChar char="–"/>
+            </a:pPr>
+            <a:r>
+              <a:rPr sz="1600" b="0">
+                <a:solidFill>
+                  <a:srgbClr val="333A42"/>
+                </a:solidFill>
+                <a:latin typeface="Calibri"/>
               </a:rPr>
               <a:t>Category listing</a:t>
             </a:r>
           </a:p>
           <a:p>
-            <a:pPr>
-              <a:spcAft>
-                <a:spcPts val="1000"/>
-              </a:spcAft>
-            </a:pPr>
-            <a:r>
-              <a:rPr sz="2000">
+            <a:pPr marL="274320" indent="-274320">
+              <a:lnSpc>
+                <a:spcPct val="105000"/>
+              </a:lnSpc>
+              <a:spcBef>
+                <a:spcPts val="1300"/>
+              </a:spcBef>
+              <a:spcAft>
+                <a:spcPts val="300"/>
+              </a:spcAft>
+              <a:buClr>
+                <a:srgbClr val="1E8E4F"/>
+              </a:buClr>
+              <a:buSzPct val="85000"/>
+              <a:buFont typeface="Arial"/>
+              <a:buChar char="▪"/>
+            </a:pPr>
+            <a:r>
+              <a:rPr sz="2000" b="0">
                 <a:solidFill>
                   <a:srgbClr val="1F364D"/>
                 </a:solidFill>
+                <a:latin typeface="Calibri"/>
               </a:rPr>
               <a:t>No single structure serves all four efficiently</a:t>
             </a:r>
@@ -5252,8 +6894,8 @@
         </p:nvSpPr>
         <p:spPr>
           <a:xfrm>
-            <a:off x="457200" y="320040"/>
-            <a:ext cx="8229600" cy="914400"/>
+            <a:off x="822960" y="475488"/>
+            <a:ext cx="10545775" cy="658368"/>
           </a:xfrm>
           <a:prstGeom prst="rect">
             <a:avLst/>
@@ -5261,16 +6903,25 @@
           <a:noFill/>
         </p:spPr>
         <p:txBody>
-          <a:bodyPr wrap="none">
+          <a:bodyPr wrap="square" anchor="t" lIns="0" rIns="0" tIns="0" bIns="0">
             <a:spAutoFit/>
           </a:bodyPr>
           <a:lstStyle/>
           <a:p>
-            <a:r>
-              <a:rPr sz="3000" b="1">
+            <a:pPr>
+              <a:spcBef>
+                <a:spcPts val="0"/>
+              </a:spcBef>
+              <a:spcAft>
+                <a:spcPts val="0"/>
+              </a:spcAft>
+            </a:pPr>
+            <a:r>
+              <a:rPr sz="2800" b="1">
                 <a:solidFill>
                   <a:srgbClr val="1F364D"/>
                 </a:solidFill>
+                <a:latin typeface="Calibri"/>
               </a:rPr>
               <a:t>Design: One Structure per Query Pattern</a:t>
             </a:r>
@@ -5279,14 +6930,102 @@
       </p:sp>
       <p:sp>
         <p:nvSpPr>
-          <p:cNvPr id="3" name="TextBox 2"/>
+          <p:cNvPr id="3" name="Rectangle 2"/>
+          <p:cNvSpPr/>
+          <p:nvPr/>
+        </p:nvSpPr>
+        <p:spPr>
+          <a:xfrm>
+            <a:off x="822960" y="1170432"/>
+            <a:ext cx="1371600" cy="50292"/>
+          </a:xfrm>
+          <a:prstGeom prst="rect">
+            <a:avLst/>
+          </a:prstGeom>
+          <a:solidFill>
+            <a:srgbClr val="1E8E4F"/>
+          </a:solidFill>
+          <a:ln>
+            <a:noFill/>
+          </a:ln>
+          <a:effectLst/>
+        </p:spPr>
+        <p:style>
+          <a:lnRef idx="1">
+            <a:schemeClr val="accent1"/>
+          </a:lnRef>
+          <a:fillRef idx="3">
+            <a:schemeClr val="accent1"/>
+          </a:fillRef>
+          <a:effectRef idx="2">
+            <a:schemeClr val="accent1"/>
+          </a:effectRef>
+          <a:fontRef idx="minor">
+            <a:schemeClr val="lt1"/>
+          </a:fontRef>
+        </p:style>
+        <p:txBody>
+          <a:bodyPr rtlCol="0" anchor="ctr"/>
+          <a:lstStyle/>
+          <a:p>
+            <a:pPr algn="ctr"/>
+          </a:p>
+        </p:txBody>
+      </p:sp>
+      <p:sp>
+        <p:nvSpPr>
+          <p:cNvPr id="4" name="Rectangle 3"/>
+          <p:cNvSpPr/>
+          <p:nvPr/>
+        </p:nvSpPr>
+        <p:spPr>
+          <a:xfrm>
+            <a:off x="822960" y="6089904"/>
+            <a:ext cx="10545775" cy="10972"/>
+          </a:xfrm>
+          <a:prstGeom prst="rect">
+            <a:avLst/>
+          </a:prstGeom>
+          <a:solidFill>
+            <a:srgbClr val="D8DCE1"/>
+          </a:solidFill>
+          <a:ln>
+            <a:noFill/>
+          </a:ln>
+          <a:effectLst/>
+        </p:spPr>
+        <p:style>
+          <a:lnRef idx="1">
+            <a:schemeClr val="accent1"/>
+          </a:lnRef>
+          <a:fillRef idx="3">
+            <a:schemeClr val="accent1"/>
+          </a:fillRef>
+          <a:effectRef idx="2">
+            <a:schemeClr val="accent1"/>
+          </a:effectRef>
+          <a:fontRef idx="minor">
+            <a:schemeClr val="lt1"/>
+          </a:fontRef>
+        </p:style>
+        <p:txBody>
+          <a:bodyPr rtlCol="0" anchor="ctr"/>
+          <a:lstStyle/>
+          <a:p>
+            <a:pPr algn="ctr"/>
+          </a:p>
+        </p:txBody>
+      </p:sp>
+      <p:sp>
+        <p:nvSpPr>
+          <p:cNvPr id="5" name="TextBox 4"/>
           <p:cNvSpPr txBox="1"/>
           <p:nvPr/>
         </p:nvSpPr>
         <p:spPr>
           <a:xfrm>
-            <a:off x="640080" y="1371600"/>
-            <a:ext cx="7863840" cy="4846320"/>
+            <a:off x="822960" y="6236208"/>
+            <a:ext cx="9814255" cy="256032"/>
           </a:xfrm>
           <a:prstGeom prst="rect">
             <a:avLst/>
@@ -5294,96 +7033,258 @@
           <a:noFill/>
         </p:spPr>
         <p:txBody>
-          <a:bodyPr wrap="square">
+          <a:bodyPr wrap="square" anchor="t" lIns="0" rIns="0" tIns="0" bIns="0">
             <a:spAutoFit/>
           </a:bodyPr>
           <a:lstStyle/>
           <a:p>
             <a:pPr>
-              <a:spcAft>
-                <a:spcPts val="1000"/>
-              </a:spcAft>
-            </a:pPr>
-            <a:r>
-              <a:rPr sz="2000">
+              <a:spcBef>
+                <a:spcPts val="0"/>
+              </a:spcBef>
+              <a:spcAft>
+                <a:spcPts val="0"/>
+              </a:spcAft>
+            </a:pPr>
+            <a:r>
+              <a:rPr sz="1000" b="0">
+                <a:solidFill>
+                  <a:srgbClr val="6B727B"/>
+                </a:solidFill>
+                <a:latin typeface="Calibri"/>
+              </a:rPr>
+              <a:t>Rahul Solanki  |  MSCS-532-B01  |  Dynamic Inventory Management</a:t>
+            </a:r>
+          </a:p>
+        </p:txBody>
+      </p:sp>
+      <p:sp>
+        <p:nvSpPr>
+          <p:cNvPr id="6" name="TextBox 5"/>
+          <p:cNvSpPr txBox="1"/>
+          <p:nvPr/>
+        </p:nvSpPr>
+        <p:spPr>
+          <a:xfrm>
+            <a:off x="10637215" y="6236208"/>
+            <a:ext cx="731520" cy="256032"/>
+          </a:xfrm>
+          <a:prstGeom prst="rect">
+            <a:avLst/>
+          </a:prstGeom>
+          <a:noFill/>
+        </p:spPr>
+        <p:txBody>
+          <a:bodyPr wrap="square" anchor="t" lIns="0" rIns="0" tIns="0" bIns="0">
+            <a:spAutoFit/>
+          </a:bodyPr>
+          <a:lstStyle/>
+          <a:p>
+            <a:pPr algn="r">
+              <a:spcBef>
+                <a:spcPts val="0"/>
+              </a:spcBef>
+              <a:spcAft>
+                <a:spcPts val="0"/>
+              </a:spcAft>
+            </a:pPr>
+            <a:r>
+              <a:rPr sz="1000" b="0">
+                <a:solidFill>
+                  <a:srgbClr val="6B727B"/>
+                </a:solidFill>
+                <a:latin typeface="Calibri"/>
+              </a:rPr>
+              <a:t>3</a:t>
+            </a:r>
+          </a:p>
+        </p:txBody>
+      </p:sp>
+      <p:sp>
+        <p:nvSpPr>
+          <p:cNvPr id="7" name="TextBox 6"/>
+          <p:cNvSpPr txBox="1"/>
+          <p:nvPr/>
+        </p:nvSpPr>
+        <p:spPr>
+          <a:xfrm>
+            <a:off x="822960" y="1536192"/>
+            <a:ext cx="10545775" cy="4389120"/>
+          </a:xfrm>
+          <a:prstGeom prst="rect">
+            <a:avLst/>
+          </a:prstGeom>
+          <a:noFill/>
+        </p:spPr>
+        <p:txBody>
+          <a:bodyPr wrap="square" anchor="ctr" lIns="0" rIns="0" tIns="0" bIns="0">
+            <a:spAutoFit/>
+          </a:bodyPr>
+          <a:lstStyle/>
+          <a:p>
+            <a:pPr marL="274320" indent="-274320">
+              <a:lnSpc>
+                <a:spcPct val="105000"/>
+              </a:lnSpc>
+              <a:spcBef>
+                <a:spcPts val="0"/>
+              </a:spcBef>
+              <a:spcAft>
+                <a:spcPts val="300"/>
+              </a:spcAft>
+              <a:buClr>
+                <a:srgbClr val="1E8E4F"/>
+              </a:buClr>
+              <a:buSzPct val="85000"/>
+              <a:buFont typeface="Arial"/>
+              <a:buChar char="▪"/>
+            </a:pPr>
+            <a:r>
+              <a:rPr sz="2000" b="0">
                 <a:solidFill>
                   <a:srgbClr val="1F364D"/>
                 </a:solidFill>
-              </a:rPr>
-              <a:t>Hash table  -&gt;  SKU lookup, O(1) expected</a:t>
-            </a:r>
-          </a:p>
-          <a:p>
-            <a:pPr>
-              <a:spcAft>
-                <a:spcPts val="1000"/>
-              </a:spcAft>
-            </a:pPr>
-            <a:r>
-              <a:rPr sz="2000">
+                <a:latin typeface="Calibri"/>
+              </a:rPr>
+              <a:t>Hash table  →  SKU lookup, O(1) expected</a:t>
+            </a:r>
+          </a:p>
+          <a:p>
+            <a:pPr marL="274320" indent="-274320">
+              <a:lnSpc>
+                <a:spcPct val="105000"/>
+              </a:lnSpc>
+              <a:spcBef>
+                <a:spcPts val="1300"/>
+              </a:spcBef>
+              <a:spcAft>
+                <a:spcPts val="300"/>
+              </a:spcAft>
+              <a:buClr>
+                <a:srgbClr val="1E8E4F"/>
+              </a:buClr>
+              <a:buSzPct val="85000"/>
+              <a:buFont typeface="Arial"/>
+              <a:buChar char="▪"/>
+            </a:pPr>
+            <a:r>
+              <a:rPr sz="2000" b="0">
                 <a:solidFill>
                   <a:srgbClr val="1F364D"/>
                 </a:solidFill>
-              </a:rPr>
-              <a:t>Binary min-heap (keyed on quantity)  -&gt;  low-stock, O(log n)</a:t>
-            </a:r>
-          </a:p>
-          <a:p>
-            <a:pPr>
-              <a:spcAft>
-                <a:spcPts val="1000"/>
-              </a:spcAft>
-            </a:pPr>
-            <a:r>
-              <a:rPr sz="2000">
+                <a:latin typeface="Calibri"/>
+              </a:rPr>
+              <a:t>Binary min-heap (keyed on quantity)  →  low-stock, O(log n)</a:t>
+            </a:r>
+          </a:p>
+          <a:p>
+            <a:pPr marL="274320" indent="-274320">
+              <a:lnSpc>
+                <a:spcPct val="105000"/>
+              </a:lnSpc>
+              <a:spcBef>
+                <a:spcPts val="1300"/>
+              </a:spcBef>
+              <a:spcAft>
+                <a:spcPts val="300"/>
+              </a:spcAft>
+              <a:buClr>
+                <a:srgbClr val="1E8E4F"/>
+              </a:buClr>
+              <a:buSzPct val="85000"/>
+              <a:buFont typeface="Arial"/>
+              <a:buChar char="▪"/>
+            </a:pPr>
+            <a:r>
+              <a:rPr sz="2000" b="0">
                 <a:solidFill>
                   <a:srgbClr val="1F364D"/>
                 </a:solidFill>
-              </a:rPr>
-              <a:t>Skip list (keyed on price, SKU)  -&gt;  range queries, O(log n + m)</a:t>
-            </a:r>
-          </a:p>
-          <a:p>
-            <a:pPr>
-              <a:spcAft>
-                <a:spcPts val="1000"/>
-              </a:spcAft>
-            </a:pPr>
-            <a:r>
-              <a:rPr sz="2000">
+                <a:latin typeface="Calibri"/>
+              </a:rPr>
+              <a:t>Skip list (keyed on price, SKU)  →  range queries, O(log n + m)</a:t>
+            </a:r>
+          </a:p>
+          <a:p>
+            <a:pPr marL="274320" indent="-274320">
+              <a:lnSpc>
+                <a:spcPct val="105000"/>
+              </a:lnSpc>
+              <a:spcBef>
+                <a:spcPts val="1300"/>
+              </a:spcBef>
+              <a:spcAft>
+                <a:spcPts val="300"/>
+              </a:spcAft>
+              <a:buClr>
+                <a:srgbClr val="1E8E4F"/>
+              </a:buClr>
+              <a:buSzPct val="85000"/>
+              <a:buFont typeface="Arial"/>
+              <a:buChar char="▪"/>
+            </a:pPr>
+            <a:r>
+              <a:rPr sz="2000" b="0">
                 <a:solidFill>
                   <a:srgbClr val="1F364D"/>
                 </a:solidFill>
-              </a:rPr>
-              <a:t>Hash table of category -&gt; SKU set  -&gt;  listing, O(1) membership</a:t>
-            </a:r>
-          </a:p>
-          <a:p>
-            <a:pPr>
-              <a:spcAft>
-                <a:spcPts val="1000"/>
-              </a:spcAft>
-            </a:pPr>
-            <a:r>
-              <a:rPr sz="2000">
+                <a:latin typeface="Calibri"/>
+              </a:rPr>
+              <a:t>Hash table of category → SKU set  →  listing, O(1) membership</a:t>
+            </a:r>
+          </a:p>
+          <a:p>
+            <a:pPr marL="274320" indent="-274320">
+              <a:lnSpc>
+                <a:spcPct val="105000"/>
+              </a:lnSpc>
+              <a:spcBef>
+                <a:spcPts val="1300"/>
+              </a:spcBef>
+              <a:spcAft>
+                <a:spcPts val="300"/>
+              </a:spcAft>
+              <a:buClr>
+                <a:srgbClr val="1E8E4F"/>
+              </a:buClr>
+              <a:buSzPct val="85000"/>
+              <a:buFont typeface="Arial"/>
+              <a:buChar char="▪"/>
+            </a:pPr>
+            <a:r>
+              <a:rPr sz="2000" b="0">
                 <a:solidFill>
                   <a:srgbClr val="1F364D"/>
                 </a:solidFill>
+                <a:latin typeface="Calibri"/>
               </a:rPr>
               <a:t>InventorySystem facade keeps all indexes consistent</a:t>
             </a:r>
           </a:p>
           <a:p>
-            <a:pPr lvl="1">
-              <a:spcAft>
-                <a:spcPts val="1000"/>
-              </a:spcAft>
-            </a:pPr>
-            <a:r>
-              <a:rPr sz="1600">
-                <a:solidFill>
-                  <a:srgbClr val="444444"/>
-                </a:solidFill>
+            <a:pPr marL="676656" indent="-256032">
+              <a:lnSpc>
+                <a:spcPct val="105000"/>
+              </a:lnSpc>
+              <a:spcBef>
+                <a:spcPts val="500"/>
+              </a:spcBef>
+              <a:spcAft>
+                <a:spcPts val="300"/>
+              </a:spcAft>
+              <a:buClr>
+                <a:srgbClr val="6B727B"/>
+              </a:buClr>
+              <a:buSzPct val="85000"/>
+              <a:buFont typeface="Arial"/>
+              <a:buChar char="–"/>
+            </a:pPr>
+            <a:r>
+              <a:rPr sz="1600" b="0">
+                <a:solidFill>
+                  <a:srgbClr val="333A42"/>
+                </a:solidFill>
+                <a:latin typeface="Calibri"/>
               </a:rPr>
               <a:t>Validate first, then mutate every affected index</a:t>
             </a:r>
@@ -5416,8 +7317,8 @@
         </p:nvSpPr>
         <p:spPr>
           <a:xfrm>
-            <a:off x="457200" y="320040"/>
-            <a:ext cx="8229600" cy="914400"/>
+            <a:off x="822960" y="475488"/>
+            <a:ext cx="10545775" cy="658368"/>
           </a:xfrm>
           <a:prstGeom prst="rect">
             <a:avLst/>
@@ -5425,16 +7326,25 @@
           <a:noFill/>
         </p:spPr>
         <p:txBody>
-          <a:bodyPr wrap="none">
+          <a:bodyPr wrap="square" anchor="t" lIns="0" rIns="0" tIns="0" bIns="0">
             <a:spAutoFit/>
           </a:bodyPr>
           <a:lstStyle/>
           <a:p>
-            <a:r>
-              <a:rPr sz="3000" b="1">
+            <a:pPr>
+              <a:spcBef>
+                <a:spcPts val="0"/>
+              </a:spcBef>
+              <a:spcAft>
+                <a:spcPts val="0"/>
+              </a:spcAft>
+            </a:pPr>
+            <a:r>
+              <a:rPr sz="2800" b="1">
                 <a:solidFill>
                   <a:srgbClr val="1F364D"/>
                 </a:solidFill>
+                <a:latin typeface="Calibri"/>
               </a:rPr>
               <a:t>Phase 2: Proof of Concept</a:t>
             </a:r>
@@ -5443,14 +7353,102 @@
       </p:sp>
       <p:sp>
         <p:nvSpPr>
-          <p:cNvPr id="3" name="TextBox 2"/>
+          <p:cNvPr id="3" name="Rectangle 2"/>
+          <p:cNvSpPr/>
+          <p:nvPr/>
+        </p:nvSpPr>
+        <p:spPr>
+          <a:xfrm>
+            <a:off x="822960" y="1170432"/>
+            <a:ext cx="1371600" cy="50292"/>
+          </a:xfrm>
+          <a:prstGeom prst="rect">
+            <a:avLst/>
+          </a:prstGeom>
+          <a:solidFill>
+            <a:srgbClr val="1E8E4F"/>
+          </a:solidFill>
+          <a:ln>
+            <a:noFill/>
+          </a:ln>
+          <a:effectLst/>
+        </p:spPr>
+        <p:style>
+          <a:lnRef idx="1">
+            <a:schemeClr val="accent1"/>
+          </a:lnRef>
+          <a:fillRef idx="3">
+            <a:schemeClr val="accent1"/>
+          </a:fillRef>
+          <a:effectRef idx="2">
+            <a:schemeClr val="accent1"/>
+          </a:effectRef>
+          <a:fontRef idx="minor">
+            <a:schemeClr val="lt1"/>
+          </a:fontRef>
+        </p:style>
+        <p:txBody>
+          <a:bodyPr rtlCol="0" anchor="ctr"/>
+          <a:lstStyle/>
+          <a:p>
+            <a:pPr algn="ctr"/>
+          </a:p>
+        </p:txBody>
+      </p:sp>
+      <p:sp>
+        <p:nvSpPr>
+          <p:cNvPr id="4" name="Rectangle 3"/>
+          <p:cNvSpPr/>
+          <p:nvPr/>
+        </p:nvSpPr>
+        <p:spPr>
+          <a:xfrm>
+            <a:off x="822960" y="6089904"/>
+            <a:ext cx="10545775" cy="10972"/>
+          </a:xfrm>
+          <a:prstGeom prst="rect">
+            <a:avLst/>
+          </a:prstGeom>
+          <a:solidFill>
+            <a:srgbClr val="D8DCE1"/>
+          </a:solidFill>
+          <a:ln>
+            <a:noFill/>
+          </a:ln>
+          <a:effectLst/>
+        </p:spPr>
+        <p:style>
+          <a:lnRef idx="1">
+            <a:schemeClr val="accent1"/>
+          </a:lnRef>
+          <a:fillRef idx="3">
+            <a:schemeClr val="accent1"/>
+          </a:fillRef>
+          <a:effectRef idx="2">
+            <a:schemeClr val="accent1"/>
+          </a:effectRef>
+          <a:fontRef idx="minor">
+            <a:schemeClr val="lt1"/>
+          </a:fontRef>
+        </p:style>
+        <p:txBody>
+          <a:bodyPr rtlCol="0" anchor="ctr"/>
+          <a:lstStyle/>
+          <a:p>
+            <a:pPr algn="ctr"/>
+          </a:p>
+        </p:txBody>
+      </p:sp>
+      <p:sp>
+        <p:nvSpPr>
+          <p:cNvPr id="5" name="TextBox 4"/>
           <p:cNvSpPr txBox="1"/>
           <p:nvPr/>
         </p:nvSpPr>
         <p:spPr>
           <a:xfrm>
-            <a:off x="640080" y="1371600"/>
-            <a:ext cx="7863840" cy="4846320"/>
+            <a:off x="822960" y="6236208"/>
+            <a:ext cx="9814255" cy="256032"/>
           </a:xfrm>
           <a:prstGeom prst="rect">
             <a:avLst/>
@@ -5458,126 +7456,314 @@
           <a:noFill/>
         </p:spPr>
         <p:txBody>
-          <a:bodyPr wrap="square">
+          <a:bodyPr wrap="square" anchor="t" lIns="0" rIns="0" tIns="0" bIns="0">
             <a:spAutoFit/>
           </a:bodyPr>
           <a:lstStyle/>
           <a:p>
             <a:pPr>
-              <a:spcAft>
-                <a:spcPts val="1000"/>
-              </a:spcAft>
-            </a:pPr>
-            <a:r>
-              <a:rPr sz="2000">
+              <a:spcBef>
+                <a:spcPts val="0"/>
+              </a:spcBef>
+              <a:spcAft>
+                <a:spcPts val="0"/>
+              </a:spcAft>
+            </a:pPr>
+            <a:r>
+              <a:rPr sz="1000" b="0">
+                <a:solidFill>
+                  <a:srgbClr val="6B727B"/>
+                </a:solidFill>
+                <a:latin typeface="Calibri"/>
+              </a:rPr>
+              <a:t>Rahul Solanki  |  MSCS-532-B01  |  Dynamic Inventory Management</a:t>
+            </a:r>
+          </a:p>
+        </p:txBody>
+      </p:sp>
+      <p:sp>
+        <p:nvSpPr>
+          <p:cNvPr id="6" name="TextBox 5"/>
+          <p:cNvSpPr txBox="1"/>
+          <p:nvPr/>
+        </p:nvSpPr>
+        <p:spPr>
+          <a:xfrm>
+            <a:off x="10637215" y="6236208"/>
+            <a:ext cx="731520" cy="256032"/>
+          </a:xfrm>
+          <a:prstGeom prst="rect">
+            <a:avLst/>
+          </a:prstGeom>
+          <a:noFill/>
+        </p:spPr>
+        <p:txBody>
+          <a:bodyPr wrap="square" anchor="t" lIns="0" rIns="0" tIns="0" bIns="0">
+            <a:spAutoFit/>
+          </a:bodyPr>
+          <a:lstStyle/>
+          <a:p>
+            <a:pPr algn="r">
+              <a:spcBef>
+                <a:spcPts val="0"/>
+              </a:spcBef>
+              <a:spcAft>
+                <a:spcPts val="0"/>
+              </a:spcAft>
+            </a:pPr>
+            <a:r>
+              <a:rPr sz="1000" b="0">
+                <a:solidFill>
+                  <a:srgbClr val="6B727B"/>
+                </a:solidFill>
+                <a:latin typeface="Calibri"/>
+              </a:rPr>
+              <a:t>4</a:t>
+            </a:r>
+          </a:p>
+        </p:txBody>
+      </p:sp>
+      <p:sp>
+        <p:nvSpPr>
+          <p:cNvPr id="7" name="TextBox 6"/>
+          <p:cNvSpPr txBox="1"/>
+          <p:nvPr/>
+        </p:nvSpPr>
+        <p:spPr>
+          <a:xfrm>
+            <a:off x="822960" y="1536192"/>
+            <a:ext cx="10545775" cy="4389120"/>
+          </a:xfrm>
+          <a:prstGeom prst="rect">
+            <a:avLst/>
+          </a:prstGeom>
+          <a:noFill/>
+        </p:spPr>
+        <p:txBody>
+          <a:bodyPr wrap="square" anchor="ctr" lIns="0" rIns="0" tIns="0" bIns="0">
+            <a:spAutoFit/>
+          </a:bodyPr>
+          <a:lstStyle/>
+          <a:p>
+            <a:pPr marL="274320" indent="-274320">
+              <a:lnSpc>
+                <a:spcPct val="105000"/>
+              </a:lnSpc>
+              <a:spcBef>
+                <a:spcPts val="0"/>
+              </a:spcBef>
+              <a:spcAft>
+                <a:spcPts val="300"/>
+              </a:spcAft>
+              <a:buClr>
+                <a:srgbClr val="1E8E4F"/>
+              </a:buClr>
+              <a:buSzPct val="85000"/>
+              <a:buFont typeface="Arial"/>
+              <a:buChar char="▪"/>
+            </a:pPr>
+            <a:r>
+              <a:rPr sz="2000" b="0">
                 <a:solidFill>
                   <a:srgbClr val="1F364D"/>
                 </a:solidFill>
+                <a:latin typeface="Calibri"/>
               </a:rPr>
               <a:t>Every structure implemented from first principles</a:t>
             </a:r>
           </a:p>
           <a:p>
-            <a:pPr lvl="1">
-              <a:spcAft>
-                <a:spcPts val="1000"/>
-              </a:spcAft>
-            </a:pPr>
-            <a:r>
-              <a:rPr sz="1600">
-                <a:solidFill>
-                  <a:srgbClr val="444444"/>
-                </a:solidFill>
+            <a:pPr marL="676656" indent="-256032">
+              <a:lnSpc>
+                <a:spcPct val="105000"/>
+              </a:lnSpc>
+              <a:spcBef>
+                <a:spcPts val="500"/>
+              </a:spcBef>
+              <a:spcAft>
+                <a:spcPts val="300"/>
+              </a:spcAft>
+              <a:buClr>
+                <a:srgbClr val="6B727B"/>
+              </a:buClr>
+              <a:buSzPct val="85000"/>
+              <a:buFont typeface="Arial"/>
+              <a:buChar char="–"/>
+            </a:pPr>
+            <a:r>
+              <a:rPr sz="1600" b="0">
+                <a:solidFill>
+                  <a:srgbClr val="333A42"/>
+                </a:solidFill>
+                <a:latin typeface="Calibri"/>
               </a:rPr>
               <a:t>No external dependencies in the core</a:t>
             </a:r>
           </a:p>
           <a:p>
-            <a:pPr>
-              <a:spcAft>
-                <a:spcPts val="1000"/>
-              </a:spcAft>
-            </a:pPr>
-            <a:r>
-              <a:rPr sz="2000">
+            <a:pPr marL="274320" indent="-274320">
+              <a:lnSpc>
+                <a:spcPct val="105000"/>
+              </a:lnSpc>
+              <a:spcBef>
+                <a:spcPts val="1300"/>
+              </a:spcBef>
+              <a:spcAft>
+                <a:spcPts val="300"/>
+              </a:spcAft>
+              <a:buClr>
+                <a:srgbClr val="1E8E4F"/>
+              </a:buClr>
+              <a:buSzPct val="85000"/>
+              <a:buFont typeface="Arial"/>
+              <a:buChar char="▪"/>
+            </a:pPr>
+            <a:r>
+              <a:rPr sz="2000" b="0">
                 <a:solidFill>
                   <a:srgbClr val="1F364D"/>
                 </a:solidFill>
+                <a:latin typeface="Calibri"/>
               </a:rPr>
               <a:t>All operations functional end to end</a:t>
             </a:r>
           </a:p>
           <a:p>
-            <a:pPr lvl="1">
-              <a:spcAft>
-                <a:spcPts val="1000"/>
-              </a:spcAft>
-            </a:pPr>
-            <a:r>
-              <a:rPr sz="1600">
-                <a:solidFill>
-                  <a:srgbClr val="444444"/>
-                </a:solidFill>
+            <a:pPr marL="676656" indent="-256032">
+              <a:lnSpc>
+                <a:spcPct val="105000"/>
+              </a:lnSpc>
+              <a:spcBef>
+                <a:spcPts val="500"/>
+              </a:spcBef>
+              <a:spcAft>
+                <a:spcPts val="300"/>
+              </a:spcAft>
+              <a:buClr>
+                <a:srgbClr val="6B727B"/>
+              </a:buClr>
+              <a:buSzPct val="85000"/>
+              <a:buFont typeface="Arial"/>
+              <a:buChar char="–"/>
+            </a:pPr>
+            <a:r>
+              <a:rPr sz="1600" b="0">
+                <a:solidFill>
+                  <a:srgbClr val="333A42"/>
+                </a:solidFill>
+                <a:latin typeface="Calibri"/>
               </a:rPr>
               <a:t>add / get / update quantity / update price / remove</a:t>
             </a:r>
           </a:p>
           <a:p>
-            <a:pPr lvl="1">
-              <a:spcAft>
-                <a:spcPts val="1000"/>
-              </a:spcAft>
-            </a:pPr>
-            <a:r>
-              <a:rPr sz="1600">
-                <a:solidFill>
-                  <a:srgbClr val="444444"/>
-                </a:solidFill>
+            <a:pPr marL="676656" indent="-256032">
+              <a:lnSpc>
+                <a:spcPct val="105000"/>
+              </a:lnSpc>
+              <a:spcBef>
+                <a:spcPts val="500"/>
+              </a:spcBef>
+              <a:spcAft>
+                <a:spcPts val="300"/>
+              </a:spcAft>
+              <a:buClr>
+                <a:srgbClr val="6B727B"/>
+              </a:buClr>
+              <a:buSzPct val="85000"/>
+              <a:buFont typeface="Arial"/>
+              <a:buChar char="–"/>
+            </a:pPr>
+            <a:r>
+              <a:rPr sz="1600" b="0">
+                <a:solidFill>
+                  <a:srgbClr val="333A42"/>
+                </a:solidFill>
+                <a:latin typeface="Calibri"/>
               </a:rPr>
               <a:t>low_stock(k), price ranges, categories</a:t>
             </a:r>
           </a:p>
           <a:p>
-            <a:pPr>
-              <a:spcAft>
-                <a:spcPts val="1000"/>
-              </a:spcAft>
-            </a:pPr>
-            <a:r>
-              <a:rPr sz="2000">
+            <a:pPr marL="274320" indent="-274320">
+              <a:lnSpc>
+                <a:spcPct val="105000"/>
+              </a:lnSpc>
+              <a:spcBef>
+                <a:spcPts val="1300"/>
+              </a:spcBef>
+              <a:spcAft>
+                <a:spcPts val="300"/>
+              </a:spcAft>
+              <a:buClr>
+                <a:srgbClr val="1E8E4F"/>
+              </a:buClr>
+              <a:buSzPct val="85000"/>
+              <a:buFont typeface="Arial"/>
+              <a:buChar char="▪"/>
+            </a:pPr>
+            <a:r>
+              <a:rPr sz="2000" b="0">
                 <a:solidFill>
                   <a:srgbClr val="1F364D"/>
                 </a:solidFill>
+                <a:latin typeface="Calibri"/>
               </a:rPr>
               <a:t>65-test contract suite + guided demo script</a:t>
             </a:r>
           </a:p>
           <a:p>
-            <a:pPr lvl="1">
-              <a:spcAft>
-                <a:spcPts val="1000"/>
-              </a:spcAft>
-            </a:pPr>
-            <a:r>
-              <a:rPr sz="1600">
-                <a:solidFill>
-                  <a:srgbClr val="444444"/>
-                </a:solidFill>
+            <a:pPr marL="676656" indent="-256032">
+              <a:lnSpc>
+                <a:spcPct val="105000"/>
+              </a:lnSpc>
+              <a:spcBef>
+                <a:spcPts val="500"/>
+              </a:spcBef>
+              <a:spcAft>
+                <a:spcPts val="300"/>
+              </a:spcAft>
+              <a:buClr>
+                <a:srgbClr val="6B727B"/>
+              </a:buClr>
+              <a:buSzPct val="85000"/>
+              <a:buFont typeface="Arial"/>
+              <a:buChar char="–"/>
+            </a:pPr>
+            <a:r>
+              <a:rPr sz="1600" b="0">
+                <a:solidFill>
+                  <a:srgbClr val="333A42"/>
+                </a:solidFill>
+                <a:latin typeface="Calibri"/>
               </a:rPr>
               <a:t>Same assertions later validate the optimized code</a:t>
             </a:r>
           </a:p>
           <a:p>
-            <a:pPr>
-              <a:spcAft>
-                <a:spcPts val="1000"/>
-              </a:spcAft>
-            </a:pPr>
-            <a:r>
-              <a:rPr sz="2000">
+            <a:pPr marL="274320" indent="-274320">
+              <a:lnSpc>
+                <a:spcPct val="105000"/>
+              </a:lnSpc>
+              <a:spcBef>
+                <a:spcPts val="1300"/>
+              </a:spcBef>
+              <a:spcAft>
+                <a:spcPts val="300"/>
+              </a:spcAft>
+              <a:buClr>
+                <a:srgbClr val="1E8E4F"/>
+              </a:buClr>
+              <a:buSzPct val="85000"/>
+              <a:buFont typeface="Arial"/>
+              <a:buChar char="▪"/>
+            </a:pPr>
+            <a:r>
+              <a:rPr sz="2000" b="0">
                 <a:solidFill>
                   <a:srgbClr val="1F364D"/>
                 </a:solidFill>
+                <a:latin typeface="Calibri"/>
               </a:rPr>
               <a:t>Known bottlenecks documented, deliberately deferred</a:t>
             </a:r>
@@ -5610,8 +7796,8 @@
         </p:nvSpPr>
         <p:spPr>
           <a:xfrm>
-            <a:off x="457200" y="320040"/>
-            <a:ext cx="8229600" cy="914400"/>
+            <a:off x="822960" y="475488"/>
+            <a:ext cx="10545775" cy="658368"/>
           </a:xfrm>
           <a:prstGeom prst="rect">
             <a:avLst/>
@@ -5619,16 +7805,25 @@
           <a:noFill/>
         </p:spPr>
         <p:txBody>
-          <a:bodyPr wrap="none">
+          <a:bodyPr wrap="square" anchor="t" lIns="0" rIns="0" tIns="0" bIns="0">
             <a:spAutoFit/>
           </a:bodyPr>
           <a:lstStyle/>
           <a:p>
-            <a:r>
-              <a:rPr sz="3000" b="1">
+            <a:pPr>
+              <a:spcBef>
+                <a:spcPts val="0"/>
+              </a:spcBef>
+              <a:spcAft>
+                <a:spcPts val="0"/>
+              </a:spcAft>
+            </a:pPr>
+            <a:r>
+              <a:rPr sz="2800" b="1">
                 <a:solidFill>
                   <a:srgbClr val="1F364D"/>
                 </a:solidFill>
+                <a:latin typeface="Calibri"/>
               </a:rPr>
               <a:t>Testing: Contracts Make Optimization Safe</a:t>
             </a:r>
@@ -5637,14 +7832,102 @@
       </p:sp>
       <p:sp>
         <p:nvSpPr>
-          <p:cNvPr id="3" name="TextBox 2"/>
+          <p:cNvPr id="3" name="Rectangle 2"/>
+          <p:cNvSpPr/>
+          <p:nvPr/>
+        </p:nvSpPr>
+        <p:spPr>
+          <a:xfrm>
+            <a:off x="822960" y="1170432"/>
+            <a:ext cx="1371600" cy="50292"/>
+          </a:xfrm>
+          <a:prstGeom prst="rect">
+            <a:avLst/>
+          </a:prstGeom>
+          <a:solidFill>
+            <a:srgbClr val="1E8E4F"/>
+          </a:solidFill>
+          <a:ln>
+            <a:noFill/>
+          </a:ln>
+          <a:effectLst/>
+        </p:spPr>
+        <p:style>
+          <a:lnRef idx="1">
+            <a:schemeClr val="accent1"/>
+          </a:lnRef>
+          <a:fillRef idx="3">
+            <a:schemeClr val="accent1"/>
+          </a:fillRef>
+          <a:effectRef idx="2">
+            <a:schemeClr val="accent1"/>
+          </a:effectRef>
+          <a:fontRef idx="minor">
+            <a:schemeClr val="lt1"/>
+          </a:fontRef>
+        </p:style>
+        <p:txBody>
+          <a:bodyPr rtlCol="0" anchor="ctr"/>
+          <a:lstStyle/>
+          <a:p>
+            <a:pPr algn="ctr"/>
+          </a:p>
+        </p:txBody>
+      </p:sp>
+      <p:sp>
+        <p:nvSpPr>
+          <p:cNvPr id="4" name="Rectangle 3"/>
+          <p:cNvSpPr/>
+          <p:nvPr/>
+        </p:nvSpPr>
+        <p:spPr>
+          <a:xfrm>
+            <a:off x="822960" y="6089904"/>
+            <a:ext cx="10545775" cy="10972"/>
+          </a:xfrm>
+          <a:prstGeom prst="rect">
+            <a:avLst/>
+          </a:prstGeom>
+          <a:solidFill>
+            <a:srgbClr val="D8DCE1"/>
+          </a:solidFill>
+          <a:ln>
+            <a:noFill/>
+          </a:ln>
+          <a:effectLst/>
+        </p:spPr>
+        <p:style>
+          <a:lnRef idx="1">
+            <a:schemeClr val="accent1"/>
+          </a:lnRef>
+          <a:fillRef idx="3">
+            <a:schemeClr val="accent1"/>
+          </a:fillRef>
+          <a:effectRef idx="2">
+            <a:schemeClr val="accent1"/>
+          </a:effectRef>
+          <a:fontRef idx="minor">
+            <a:schemeClr val="lt1"/>
+          </a:fontRef>
+        </p:style>
+        <p:txBody>
+          <a:bodyPr rtlCol="0" anchor="ctr"/>
+          <a:lstStyle/>
+          <a:p>
+            <a:pPr algn="ctr"/>
+          </a:p>
+        </p:txBody>
+      </p:sp>
+      <p:sp>
+        <p:nvSpPr>
+          <p:cNvPr id="5" name="TextBox 4"/>
           <p:cNvSpPr txBox="1"/>
           <p:nvPr/>
         </p:nvSpPr>
         <p:spPr>
           <a:xfrm>
-            <a:off x="640080" y="1371600"/>
-            <a:ext cx="7863840" cy="4846320"/>
+            <a:off x="822960" y="6236208"/>
+            <a:ext cx="9814255" cy="256032"/>
           </a:xfrm>
           <a:prstGeom prst="rect">
             <a:avLst/>
@@ -5652,113 +7935,288 @@
           <a:noFill/>
         </p:spPr>
         <p:txBody>
-          <a:bodyPr wrap="square">
+          <a:bodyPr wrap="square" anchor="t" lIns="0" rIns="0" tIns="0" bIns="0">
             <a:spAutoFit/>
           </a:bodyPr>
           <a:lstStyle/>
           <a:p>
             <a:pPr>
-              <a:spcAft>
-                <a:spcPts val="1000"/>
-              </a:spcAft>
-            </a:pPr>
-            <a:r>
-              <a:rPr sz="2000">
+              <a:spcBef>
+                <a:spcPts val="0"/>
+              </a:spcBef>
+              <a:spcAft>
+                <a:spcPts val="0"/>
+              </a:spcAft>
+            </a:pPr>
+            <a:r>
+              <a:rPr sz="1000" b="0">
+                <a:solidFill>
+                  <a:srgbClr val="6B727B"/>
+                </a:solidFill>
+                <a:latin typeface="Calibri"/>
+              </a:rPr>
+              <a:t>Rahul Solanki  |  MSCS-532-B01  |  Dynamic Inventory Management</a:t>
+            </a:r>
+          </a:p>
+        </p:txBody>
+      </p:sp>
+      <p:sp>
+        <p:nvSpPr>
+          <p:cNvPr id="6" name="TextBox 5"/>
+          <p:cNvSpPr txBox="1"/>
+          <p:nvPr/>
+        </p:nvSpPr>
+        <p:spPr>
+          <a:xfrm>
+            <a:off x="10637215" y="6236208"/>
+            <a:ext cx="731520" cy="256032"/>
+          </a:xfrm>
+          <a:prstGeom prst="rect">
+            <a:avLst/>
+          </a:prstGeom>
+          <a:noFill/>
+        </p:spPr>
+        <p:txBody>
+          <a:bodyPr wrap="square" anchor="t" lIns="0" rIns="0" tIns="0" bIns="0">
+            <a:spAutoFit/>
+          </a:bodyPr>
+          <a:lstStyle/>
+          <a:p>
+            <a:pPr algn="r">
+              <a:spcBef>
+                <a:spcPts val="0"/>
+              </a:spcBef>
+              <a:spcAft>
+                <a:spcPts val="0"/>
+              </a:spcAft>
+            </a:pPr>
+            <a:r>
+              <a:rPr sz="1000" b="0">
+                <a:solidFill>
+                  <a:srgbClr val="6B727B"/>
+                </a:solidFill>
+                <a:latin typeface="Calibri"/>
+              </a:rPr>
+              <a:t>5</a:t>
+            </a:r>
+          </a:p>
+        </p:txBody>
+      </p:sp>
+      <p:sp>
+        <p:nvSpPr>
+          <p:cNvPr id="7" name="TextBox 6"/>
+          <p:cNvSpPr txBox="1"/>
+          <p:nvPr/>
+        </p:nvSpPr>
+        <p:spPr>
+          <a:xfrm>
+            <a:off x="822960" y="1536192"/>
+            <a:ext cx="10545775" cy="4389120"/>
+          </a:xfrm>
+          <a:prstGeom prst="rect">
+            <a:avLst/>
+          </a:prstGeom>
+          <a:noFill/>
+        </p:spPr>
+        <p:txBody>
+          <a:bodyPr wrap="square" anchor="ctr" lIns="0" rIns="0" tIns="0" bIns="0">
+            <a:spAutoFit/>
+          </a:bodyPr>
+          <a:lstStyle/>
+          <a:p>
+            <a:pPr marL="274320" indent="-274320">
+              <a:lnSpc>
+                <a:spcPct val="105000"/>
+              </a:lnSpc>
+              <a:spcBef>
+                <a:spcPts val="0"/>
+              </a:spcBef>
+              <a:spcAft>
+                <a:spcPts val="300"/>
+              </a:spcAft>
+              <a:buClr>
+                <a:srgbClr val="1E8E4F"/>
+              </a:buClr>
+              <a:buSzPct val="85000"/>
+              <a:buFont typeface="Arial"/>
+              <a:buChar char="▪"/>
+            </a:pPr>
+            <a:r>
+              <a:rPr sz="2000" b="0">
                 <a:solidFill>
                   <a:srgbClr val="1F364D"/>
                 </a:solidFill>
+                <a:latin typeface="Calibri"/>
               </a:rPr>
               <a:t>65 tests, written once against each interface</a:t>
             </a:r>
           </a:p>
           <a:p>
-            <a:pPr lvl="1">
-              <a:spcAft>
-                <a:spcPts val="1000"/>
-              </a:spcAft>
-            </a:pPr>
-            <a:r>
-              <a:rPr sz="1600">
-                <a:solidFill>
-                  <a:srgbClr val="444444"/>
-                </a:solidFill>
+            <a:pPr marL="676656" indent="-256032">
+              <a:lnSpc>
+                <a:spcPct val="105000"/>
+              </a:lnSpc>
+              <a:spcBef>
+                <a:spcPts val="500"/>
+              </a:spcBef>
+              <a:spcAft>
+                <a:spcPts val="300"/>
+              </a:spcAft>
+              <a:buClr>
+                <a:srgbClr val="6B727B"/>
+              </a:buClr>
+              <a:buSzPct val="85000"/>
+              <a:buFont typeface="Arial"/>
+              <a:buChar char="–"/>
+            </a:pPr>
+            <a:r>
+              <a:rPr sz="1600" b="0">
+                <a:solidFill>
+                  <a:srgbClr val="333A42"/>
+                </a:solidFill>
+                <a:latin typeface="Calibri"/>
               </a:rPr>
               <a:t>Unit: ordering, resizing, tombstones, duplicates</a:t>
             </a:r>
           </a:p>
           <a:p>
-            <a:pPr lvl="1">
-              <a:spcAft>
-                <a:spcPts val="1000"/>
-              </a:spcAft>
-            </a:pPr>
-            <a:r>
-              <a:rPr sz="1600">
-                <a:solidFill>
-                  <a:srgbClr val="444444"/>
-                </a:solidFill>
+            <a:pPr marL="676656" indent="-256032">
+              <a:lnSpc>
+                <a:spcPct val="105000"/>
+              </a:lnSpc>
+              <a:spcBef>
+                <a:spcPts val="500"/>
+              </a:spcBef>
+              <a:spcAft>
+                <a:spcPts val="300"/>
+              </a:spcAft>
+              <a:buClr>
+                <a:srgbClr val="6B727B"/>
+              </a:buClr>
+              <a:buSzPct val="85000"/>
+              <a:buFont typeface="Arial"/>
+              <a:buChar char="–"/>
+            </a:pPr>
+            <a:r>
+              <a:rPr sz="1600" b="0">
+                <a:solidFill>
+                  <a:srgbClr val="333A42"/>
+                </a:solidFill>
+                <a:latin typeface="Calibri"/>
               </a:rPr>
               <a:t>Integration: updates visible through every index</a:t>
             </a:r>
           </a:p>
           <a:p>
-            <a:pPr lvl="1">
-              <a:spcAft>
-                <a:spcPts val="1000"/>
-              </a:spcAft>
-            </a:pPr>
-            <a:r>
-              <a:rPr sz="1600">
-                <a:solidFill>
-                  <a:srgbClr val="444444"/>
-                </a:solidFill>
+            <a:pPr marL="676656" indent="-256032">
+              <a:lnSpc>
+                <a:spcPct val="105000"/>
+              </a:lnSpc>
+              <a:spcBef>
+                <a:spcPts val="500"/>
+              </a:spcBef>
+              <a:spcAft>
+                <a:spcPts val="300"/>
+              </a:spcAft>
+              <a:buClr>
+                <a:srgbClr val="6B727B"/>
+              </a:buClr>
+              <a:buSzPct val="85000"/>
+              <a:buFont typeface="Arial"/>
+              <a:buChar char="–"/>
+            </a:pPr>
+            <a:r>
+              <a:rPr sz="1600" b="0">
+                <a:solidFill>
+                  <a:srgbClr val="333A42"/>
+                </a:solidFill>
+                <a:latin typeface="Calibri"/>
               </a:rPr>
               <a:t>Edge cases: empty, zero qty, equal prices, bad input</a:t>
             </a:r>
           </a:p>
           <a:p>
-            <a:pPr lvl="1">
-              <a:spcAft>
-                <a:spcPts val="1000"/>
-              </a:spcAft>
-            </a:pPr>
-            <a:r>
-              <a:rPr sz="1600">
-                <a:solidFill>
-                  <a:srgbClr val="444444"/>
-                </a:solidFill>
+            <a:pPr marL="676656" indent="-256032">
+              <a:lnSpc>
+                <a:spcPct val="105000"/>
+              </a:lnSpc>
+              <a:spcBef>
+                <a:spcPts val="500"/>
+              </a:spcBef>
+              <a:spcAft>
+                <a:spcPts val="300"/>
+              </a:spcAft>
+              <a:buClr>
+                <a:srgbClr val="6B727B"/>
+              </a:buClr>
+              <a:buSzPct val="85000"/>
+              <a:buFont typeface="Arial"/>
+              <a:buChar char="–"/>
+            </a:pPr>
+            <a:r>
+              <a:rPr sz="1600" b="0">
+                <a:solidFill>
+                  <a:srgbClr val="333A42"/>
+                </a:solidFill>
+                <a:latin typeface="Calibri"/>
               </a:rPr>
               <a:t>Randomized workloads vs reference models</a:t>
             </a:r>
           </a:p>
           <a:p>
-            <a:pPr>
-              <a:spcAft>
-                <a:spcPts val="1000"/>
-              </a:spcAft>
-            </a:pPr>
-            <a:r>
-              <a:rPr sz="2000">
+            <a:pPr marL="274320" indent="-274320">
+              <a:lnSpc>
+                <a:spcPct val="105000"/>
+              </a:lnSpc>
+              <a:spcBef>
+                <a:spcPts val="1300"/>
+              </a:spcBef>
+              <a:spcAft>
+                <a:spcPts val="300"/>
+              </a:spcAft>
+              <a:buClr>
+                <a:srgbClr val="1E8E4F"/>
+              </a:buClr>
+              <a:buSzPct val="85000"/>
+              <a:buFont typeface="Arial"/>
+              <a:buChar char="▪"/>
+            </a:pPr>
+            <a:r>
+              <a:rPr sz="2000" b="0">
                 <a:solidFill>
                   <a:srgbClr val="1F364D"/>
                 </a:solidFill>
+                <a:latin typeface="Calibri"/>
               </a:rPr>
               <a:t>Same suite binds to baseline AND optimized code</a:t>
             </a:r>
           </a:p>
           <a:p>
-            <a:pPr>
-              <a:spcAft>
-                <a:spcPts val="1000"/>
-              </a:spcAft>
-            </a:pPr>
-            <a:r>
-              <a:rPr sz="2000">
+            <a:pPr marL="274320" indent="-274320">
+              <a:lnSpc>
+                <a:spcPct val="105000"/>
+              </a:lnSpc>
+              <a:spcBef>
+                <a:spcPts val="1300"/>
+              </a:spcBef>
+              <a:spcAft>
+                <a:spcPts val="300"/>
+              </a:spcAft>
+              <a:buClr>
+                <a:srgbClr val="1E8E4F"/>
+              </a:buClr>
+              <a:buSzPct val="85000"/>
+              <a:buFont typeface="Arial"/>
+              <a:buChar char="▪"/>
+            </a:pPr>
+            <a:r>
+              <a:rPr sz="2000" b="0">
                 <a:solidFill>
                   <a:srgbClr val="1F364D"/>
                 </a:solidFill>
-              </a:rPr>
-              <a:t>Full suite runs in &lt; 0.1 s -&gt; ran after every change</a:t>
+                <a:latin typeface="Calibri"/>
+              </a:rPr>
+              <a:t>Full suite runs in &lt; 0.1 s  →  ran after every change</a:t>
             </a:r>
           </a:p>
         </p:txBody>
@@ -5789,8 +8247,8 @@
         </p:nvSpPr>
         <p:spPr>
           <a:xfrm>
-            <a:off x="457200" y="320040"/>
-            <a:ext cx="8229600" cy="914400"/>
+            <a:off x="822960" y="475488"/>
+            <a:ext cx="10545775" cy="658368"/>
           </a:xfrm>
           <a:prstGeom prst="rect">
             <a:avLst/>
@@ -5798,16 +8256,25 @@
           <a:noFill/>
         </p:spPr>
         <p:txBody>
-          <a:bodyPr wrap="none">
+          <a:bodyPr wrap="square" anchor="t" lIns="0" rIns="0" tIns="0" bIns="0">
             <a:spAutoFit/>
           </a:bodyPr>
           <a:lstStyle/>
           <a:p>
-            <a:r>
-              <a:rPr sz="3000" b="1">
+            <a:pPr>
+              <a:spcBef>
+                <a:spcPts val="0"/>
+              </a:spcBef>
+              <a:spcAft>
+                <a:spcPts val="0"/>
+              </a:spcAft>
+            </a:pPr>
+            <a:r>
+              <a:rPr sz="2800" b="1">
                 <a:solidFill>
                   <a:srgbClr val="1F364D"/>
                 </a:solidFill>
+                <a:latin typeface="Calibri"/>
               </a:rPr>
               <a:t>Measured Bottlenecks in the Baseline</a:t>
             </a:r>
@@ -5816,14 +8283,102 @@
       </p:sp>
       <p:sp>
         <p:nvSpPr>
-          <p:cNvPr id="3" name="TextBox 2"/>
+          <p:cNvPr id="3" name="Rectangle 2"/>
+          <p:cNvSpPr/>
+          <p:nvPr/>
+        </p:nvSpPr>
+        <p:spPr>
+          <a:xfrm>
+            <a:off x="822960" y="1170432"/>
+            <a:ext cx="1371600" cy="50292"/>
+          </a:xfrm>
+          <a:prstGeom prst="rect">
+            <a:avLst/>
+          </a:prstGeom>
+          <a:solidFill>
+            <a:srgbClr val="1E8E4F"/>
+          </a:solidFill>
+          <a:ln>
+            <a:noFill/>
+          </a:ln>
+          <a:effectLst/>
+        </p:spPr>
+        <p:style>
+          <a:lnRef idx="1">
+            <a:schemeClr val="accent1"/>
+          </a:lnRef>
+          <a:fillRef idx="3">
+            <a:schemeClr val="accent1"/>
+          </a:fillRef>
+          <a:effectRef idx="2">
+            <a:schemeClr val="accent1"/>
+          </a:effectRef>
+          <a:fontRef idx="minor">
+            <a:schemeClr val="lt1"/>
+          </a:fontRef>
+        </p:style>
+        <p:txBody>
+          <a:bodyPr rtlCol="0" anchor="ctr"/>
+          <a:lstStyle/>
+          <a:p>
+            <a:pPr algn="ctr"/>
+          </a:p>
+        </p:txBody>
+      </p:sp>
+      <p:sp>
+        <p:nvSpPr>
+          <p:cNvPr id="4" name="Rectangle 3"/>
+          <p:cNvSpPr/>
+          <p:nvPr/>
+        </p:nvSpPr>
+        <p:spPr>
+          <a:xfrm>
+            <a:off x="822960" y="6089904"/>
+            <a:ext cx="10545775" cy="10972"/>
+          </a:xfrm>
+          <a:prstGeom prst="rect">
+            <a:avLst/>
+          </a:prstGeom>
+          <a:solidFill>
+            <a:srgbClr val="D8DCE1"/>
+          </a:solidFill>
+          <a:ln>
+            <a:noFill/>
+          </a:ln>
+          <a:effectLst/>
+        </p:spPr>
+        <p:style>
+          <a:lnRef idx="1">
+            <a:schemeClr val="accent1"/>
+          </a:lnRef>
+          <a:fillRef idx="3">
+            <a:schemeClr val="accent1"/>
+          </a:fillRef>
+          <a:effectRef idx="2">
+            <a:schemeClr val="accent1"/>
+          </a:effectRef>
+          <a:fontRef idx="minor">
+            <a:schemeClr val="lt1"/>
+          </a:fontRef>
+        </p:style>
+        <p:txBody>
+          <a:bodyPr rtlCol="0" anchor="ctr"/>
+          <a:lstStyle/>
+          <a:p>
+            <a:pPr algn="ctr"/>
+          </a:p>
+        </p:txBody>
+      </p:sp>
+      <p:sp>
+        <p:nvSpPr>
+          <p:cNvPr id="5" name="TextBox 4"/>
           <p:cNvSpPr txBox="1"/>
           <p:nvPr/>
         </p:nvSpPr>
         <p:spPr>
           <a:xfrm>
-            <a:off x="640080" y="1371600"/>
-            <a:ext cx="7863840" cy="4846320"/>
+            <a:off x="822960" y="6236208"/>
+            <a:ext cx="9814255" cy="256032"/>
           </a:xfrm>
           <a:prstGeom prst="rect">
             <a:avLst/>
@@ -5831,96 +8386,258 @@
           <a:noFill/>
         </p:spPr>
         <p:txBody>
-          <a:bodyPr wrap="square">
+          <a:bodyPr wrap="square" anchor="t" lIns="0" rIns="0" tIns="0" bIns="0">
             <a:spAutoFit/>
           </a:bodyPr>
           <a:lstStyle/>
           <a:p>
             <a:pPr>
-              <a:spcAft>
-                <a:spcPts val="1000"/>
-              </a:spcAft>
-            </a:pPr>
-            <a:r>
-              <a:rPr sz="2000">
+              <a:spcBef>
+                <a:spcPts val="0"/>
+              </a:spcBef>
+              <a:spcAft>
+                <a:spcPts val="0"/>
+              </a:spcAft>
+            </a:pPr>
+            <a:r>
+              <a:rPr sz="1000" b="0">
+                <a:solidFill>
+                  <a:srgbClr val="6B727B"/>
+                </a:solidFill>
+                <a:latin typeface="Calibri"/>
+              </a:rPr>
+              <a:t>Rahul Solanki  |  MSCS-532-B01  |  Dynamic Inventory Management</a:t>
+            </a:r>
+          </a:p>
+        </p:txBody>
+      </p:sp>
+      <p:sp>
+        <p:nvSpPr>
+          <p:cNvPr id="6" name="TextBox 5"/>
+          <p:cNvSpPr txBox="1"/>
+          <p:nvPr/>
+        </p:nvSpPr>
+        <p:spPr>
+          <a:xfrm>
+            <a:off x="10637215" y="6236208"/>
+            <a:ext cx="731520" cy="256032"/>
+          </a:xfrm>
+          <a:prstGeom prst="rect">
+            <a:avLst/>
+          </a:prstGeom>
+          <a:noFill/>
+        </p:spPr>
+        <p:txBody>
+          <a:bodyPr wrap="square" anchor="t" lIns="0" rIns="0" tIns="0" bIns="0">
+            <a:spAutoFit/>
+          </a:bodyPr>
+          <a:lstStyle/>
+          <a:p>
+            <a:pPr algn="r">
+              <a:spcBef>
+                <a:spcPts val="0"/>
+              </a:spcBef>
+              <a:spcAft>
+                <a:spcPts val="0"/>
+              </a:spcAft>
+            </a:pPr>
+            <a:r>
+              <a:rPr sz="1000" b="0">
+                <a:solidFill>
+                  <a:srgbClr val="6B727B"/>
+                </a:solidFill>
+                <a:latin typeface="Calibri"/>
+              </a:rPr>
+              <a:t>6</a:t>
+            </a:r>
+          </a:p>
+        </p:txBody>
+      </p:sp>
+      <p:sp>
+        <p:nvSpPr>
+          <p:cNvPr id="7" name="TextBox 6"/>
+          <p:cNvSpPr txBox="1"/>
+          <p:nvPr/>
+        </p:nvSpPr>
+        <p:spPr>
+          <a:xfrm>
+            <a:off x="822960" y="1536192"/>
+            <a:ext cx="10545775" cy="4389120"/>
+          </a:xfrm>
+          <a:prstGeom prst="rect">
+            <a:avLst/>
+          </a:prstGeom>
+          <a:noFill/>
+        </p:spPr>
+        <p:txBody>
+          <a:bodyPr wrap="square" anchor="ctr" lIns="0" rIns="0" tIns="0" bIns="0">
+            <a:spAutoFit/>
+          </a:bodyPr>
+          <a:lstStyle/>
+          <a:p>
+            <a:pPr marL="274320" indent="-274320">
+              <a:lnSpc>
+                <a:spcPct val="105000"/>
+              </a:lnSpc>
+              <a:spcBef>
+                <a:spcPts val="0"/>
+              </a:spcBef>
+              <a:spcAft>
+                <a:spcPts val="300"/>
+              </a:spcAft>
+              <a:buClr>
+                <a:srgbClr val="1E8E4F"/>
+              </a:buClr>
+              <a:buSzPct val="85000"/>
+              <a:buFont typeface="Arial"/>
+              <a:buChar char="▪"/>
+            </a:pPr>
+            <a:r>
+              <a:rPr sz="2000" b="0">
                 <a:solidFill>
                   <a:srgbClr val="1F364D"/>
                 </a:solidFill>
+                <a:latin typeface="Calibri"/>
               </a:rPr>
               <a:t>Heap update-by-SKU: O(n) linear scan</a:t>
             </a:r>
           </a:p>
           <a:p>
-            <a:pPr lvl="1">
-              <a:spcAft>
-                <a:spcPts val="1000"/>
-              </a:spcAft>
-            </a:pPr>
-            <a:r>
-              <a:rPr sz="1600">
-                <a:solidFill>
-                  <a:srgbClr val="444444"/>
-                </a:solidFill>
+            <a:pPr marL="676656" indent="-256032">
+              <a:lnSpc>
+                <a:spcPct val="105000"/>
+              </a:lnSpc>
+              <a:spcBef>
+                <a:spcPts val="500"/>
+              </a:spcBef>
+              <a:spcAft>
+                <a:spcPts val="300"/>
+              </a:spcAft>
+              <a:buClr>
+                <a:srgbClr val="6B727B"/>
+              </a:buClr>
+              <a:buSzPct val="85000"/>
+              <a:buFont typeface="Arial"/>
+              <a:buChar char="–"/>
+            </a:pPr>
+            <a:r>
+              <a:rPr sz="1600" b="0">
+                <a:solidFill>
+                  <a:srgbClr val="333A42"/>
+                </a:solidFill>
+                <a:latin typeface="Calibri"/>
               </a:rPr>
               <a:t>Every quantity change scans the heap array</a:t>
             </a:r>
           </a:p>
           <a:p>
-            <a:pPr>
-              <a:spcAft>
-                <a:spcPts val="1000"/>
-              </a:spcAft>
-            </a:pPr>
-            <a:r>
-              <a:rPr sz="2000">
+            <a:pPr marL="274320" indent="-274320">
+              <a:lnSpc>
+                <a:spcPct val="105000"/>
+              </a:lnSpc>
+              <a:spcBef>
+                <a:spcPts val="1300"/>
+              </a:spcBef>
+              <a:spcAft>
+                <a:spcPts val="300"/>
+              </a:spcAft>
+              <a:buClr>
+                <a:srgbClr val="1E8E4F"/>
+              </a:buClr>
+              <a:buSzPct val="85000"/>
+              <a:buFont typeface="Arial"/>
+              <a:buChar char="▪"/>
+            </a:pPr>
+            <a:r>
+              <a:rPr sz="2000" b="0">
                 <a:solidFill>
                   <a:srgbClr val="1F364D"/>
                 </a:solidFill>
+                <a:latin typeface="Calibri"/>
               </a:rPr>
               <a:t>Low-stock query: sorts all n entries for top k</a:t>
             </a:r>
           </a:p>
           <a:p>
-            <a:pPr>
-              <a:spcAft>
-                <a:spcPts val="1000"/>
-              </a:spcAft>
-            </a:pPr>
-            <a:r>
-              <a:rPr sz="2000">
+            <a:pPr marL="274320" indent="-274320">
+              <a:lnSpc>
+                <a:spcPct val="105000"/>
+              </a:lnSpc>
+              <a:spcBef>
+                <a:spcPts val="1300"/>
+              </a:spcBef>
+              <a:spcAft>
+                <a:spcPts val="300"/>
+              </a:spcAft>
+              <a:buClr>
+                <a:srgbClr val="1E8E4F"/>
+              </a:buClr>
+              <a:buSzPct val="85000"/>
+              <a:buFont typeface="Arial"/>
+              <a:buChar char="▪"/>
+            </a:pPr>
+            <a:r>
+              <a:rPr sz="2000" b="0">
                 <a:solidFill>
                   <a:srgbClr val="1F364D"/>
                 </a:solidFill>
+                <a:latin typeface="Calibri"/>
               </a:rPr>
               <a:t>Build: n individual inserts, O(n log n)</a:t>
             </a:r>
           </a:p>
           <a:p>
-            <a:pPr>
-              <a:spcAft>
-                <a:spcPts val="1000"/>
-              </a:spcAft>
-            </a:pPr>
-            <a:r>
-              <a:rPr sz="2000">
+            <a:pPr marL="274320" indent="-274320">
+              <a:lnSpc>
+                <a:spcPct val="105000"/>
+              </a:lnSpc>
+              <a:spcBef>
+                <a:spcPts val="1300"/>
+              </a:spcBef>
+              <a:spcAft>
+                <a:spcPts val="300"/>
+              </a:spcAft>
+              <a:buClr>
+                <a:srgbClr val="1E8E4F"/>
+              </a:buClr>
+              <a:buSzPct val="85000"/>
+              <a:buFont typeface="Arial"/>
+              <a:buChar char="▪"/>
+            </a:pPr>
+            <a:r>
+              <a:rPr sz="2000" b="0">
                 <a:solidFill>
                   <a:srgbClr val="1F364D"/>
                 </a:solidFill>
+                <a:latin typeface="Calibri"/>
               </a:rPr>
               <a:t>Interpreter overhead on every skip-list pointer hop</a:t>
             </a:r>
           </a:p>
           <a:p>
-            <a:pPr>
-              <a:spcAft>
-                <a:spcPts val="1000"/>
-              </a:spcAft>
-            </a:pPr>
-            <a:r>
-              <a:rPr sz="2000">
+            <a:pPr marL="274320" indent="-274320">
+              <a:lnSpc>
+                <a:spcPct val="105000"/>
+              </a:lnSpc>
+              <a:spcBef>
+                <a:spcPts val="1300"/>
+              </a:spcBef>
+              <a:spcAft>
+                <a:spcPts val="300"/>
+              </a:spcAft>
+              <a:buClr>
+                <a:srgbClr val="1E8E4F"/>
+              </a:buClr>
+              <a:buSzPct val="85000"/>
+              <a:buFont typeface="Arial"/>
+              <a:buChar char="▪"/>
+            </a:pPr>
+            <a:r>
+              <a:rPr sz="2000" b="0">
                 <a:solidFill>
                   <a:srgbClr val="1F364D"/>
                 </a:solidFill>
+                <a:latin typeface="Calibri"/>
               </a:rPr>
               <a:t>Per-node objects inflate memory</a:t>
             </a:r>
@@ -5953,8 +8670,8 @@
         </p:nvSpPr>
         <p:spPr>
           <a:xfrm>
-            <a:off x="457200" y="320040"/>
-            <a:ext cx="8229600" cy="914400"/>
+            <a:off x="822960" y="475488"/>
+            <a:ext cx="10545775" cy="658368"/>
           </a:xfrm>
           <a:prstGeom prst="rect">
             <a:avLst/>
@@ -5962,16 +8679,25 @@
           <a:noFill/>
         </p:spPr>
         <p:txBody>
-          <a:bodyPr wrap="none">
+          <a:bodyPr wrap="square" anchor="t" lIns="0" rIns="0" tIns="0" bIns="0">
             <a:spAutoFit/>
           </a:bodyPr>
           <a:lstStyle/>
           <a:p>
-            <a:r>
-              <a:rPr sz="3000" b="1">
+            <a:pPr>
+              <a:spcBef>
+                <a:spcPts val="0"/>
+              </a:spcBef>
+              <a:spcAft>
+                <a:spcPts val="0"/>
+              </a:spcAft>
+            </a:pPr>
+            <a:r>
+              <a:rPr sz="2800" b="1">
                 <a:solidFill>
                   <a:srgbClr val="1F364D"/>
                 </a:solidFill>
+                <a:latin typeface="Calibri"/>
               </a:rPr>
               <a:t>Phase 3: Optimizations</a:t>
             </a:r>
@@ -5980,14 +8706,102 @@
       </p:sp>
       <p:sp>
         <p:nvSpPr>
-          <p:cNvPr id="3" name="TextBox 2"/>
+          <p:cNvPr id="3" name="Rectangle 2"/>
+          <p:cNvSpPr/>
+          <p:nvPr/>
+        </p:nvSpPr>
+        <p:spPr>
+          <a:xfrm>
+            <a:off x="822960" y="1170432"/>
+            <a:ext cx="1371600" cy="50292"/>
+          </a:xfrm>
+          <a:prstGeom prst="rect">
+            <a:avLst/>
+          </a:prstGeom>
+          <a:solidFill>
+            <a:srgbClr val="1E8E4F"/>
+          </a:solidFill>
+          <a:ln>
+            <a:noFill/>
+          </a:ln>
+          <a:effectLst/>
+        </p:spPr>
+        <p:style>
+          <a:lnRef idx="1">
+            <a:schemeClr val="accent1"/>
+          </a:lnRef>
+          <a:fillRef idx="3">
+            <a:schemeClr val="accent1"/>
+          </a:fillRef>
+          <a:effectRef idx="2">
+            <a:schemeClr val="accent1"/>
+          </a:effectRef>
+          <a:fontRef idx="minor">
+            <a:schemeClr val="lt1"/>
+          </a:fontRef>
+        </p:style>
+        <p:txBody>
+          <a:bodyPr rtlCol="0" anchor="ctr"/>
+          <a:lstStyle/>
+          <a:p>
+            <a:pPr algn="ctr"/>
+          </a:p>
+        </p:txBody>
+      </p:sp>
+      <p:sp>
+        <p:nvSpPr>
+          <p:cNvPr id="4" name="Rectangle 3"/>
+          <p:cNvSpPr/>
+          <p:nvPr/>
+        </p:nvSpPr>
+        <p:spPr>
+          <a:xfrm>
+            <a:off x="822960" y="6089904"/>
+            <a:ext cx="10545775" cy="10972"/>
+          </a:xfrm>
+          <a:prstGeom prst="rect">
+            <a:avLst/>
+          </a:prstGeom>
+          <a:solidFill>
+            <a:srgbClr val="D8DCE1"/>
+          </a:solidFill>
+          <a:ln>
+            <a:noFill/>
+          </a:ln>
+          <a:effectLst/>
+        </p:spPr>
+        <p:style>
+          <a:lnRef idx="1">
+            <a:schemeClr val="accent1"/>
+          </a:lnRef>
+          <a:fillRef idx="3">
+            <a:schemeClr val="accent1"/>
+          </a:fillRef>
+          <a:effectRef idx="2">
+            <a:schemeClr val="accent1"/>
+          </a:effectRef>
+          <a:fontRef idx="minor">
+            <a:schemeClr val="lt1"/>
+          </a:fontRef>
+        </p:style>
+        <p:txBody>
+          <a:bodyPr rtlCol="0" anchor="ctr"/>
+          <a:lstStyle/>
+          <a:p>
+            <a:pPr algn="ctr"/>
+          </a:p>
+        </p:txBody>
+      </p:sp>
+      <p:sp>
+        <p:nvSpPr>
+          <p:cNvPr id="5" name="TextBox 4"/>
           <p:cNvSpPr txBox="1"/>
           <p:nvPr/>
         </p:nvSpPr>
         <p:spPr>
           <a:xfrm>
-            <a:off x="640080" y="1371600"/>
-            <a:ext cx="7863840" cy="4846320"/>
+            <a:off x="822960" y="6236208"/>
+            <a:ext cx="9814255" cy="256032"/>
           </a:xfrm>
           <a:prstGeom prst="rect">
             <a:avLst/>
@@ -5995,126 +8809,314 @@
           <a:noFill/>
         </p:spPr>
         <p:txBody>
-          <a:bodyPr wrap="square">
+          <a:bodyPr wrap="square" anchor="t" lIns="0" rIns="0" tIns="0" bIns="0">
             <a:spAutoFit/>
           </a:bodyPr>
           <a:lstStyle/>
           <a:p>
             <a:pPr>
-              <a:spcAft>
-                <a:spcPts val="1000"/>
-              </a:spcAft>
-            </a:pPr>
-            <a:r>
-              <a:rPr sz="2000">
+              <a:spcBef>
+                <a:spcPts val="0"/>
+              </a:spcBef>
+              <a:spcAft>
+                <a:spcPts val="0"/>
+              </a:spcAft>
+            </a:pPr>
+            <a:r>
+              <a:rPr sz="1000" b="0">
+                <a:solidFill>
+                  <a:srgbClr val="6B727B"/>
+                </a:solidFill>
+                <a:latin typeface="Calibri"/>
+              </a:rPr>
+              <a:t>Rahul Solanki  |  MSCS-532-B01  |  Dynamic Inventory Management</a:t>
+            </a:r>
+          </a:p>
+        </p:txBody>
+      </p:sp>
+      <p:sp>
+        <p:nvSpPr>
+          <p:cNvPr id="6" name="TextBox 5"/>
+          <p:cNvSpPr txBox="1"/>
+          <p:nvPr/>
+        </p:nvSpPr>
+        <p:spPr>
+          <a:xfrm>
+            <a:off x="10637215" y="6236208"/>
+            <a:ext cx="731520" cy="256032"/>
+          </a:xfrm>
+          <a:prstGeom prst="rect">
+            <a:avLst/>
+          </a:prstGeom>
+          <a:noFill/>
+        </p:spPr>
+        <p:txBody>
+          <a:bodyPr wrap="square" anchor="t" lIns="0" rIns="0" tIns="0" bIns="0">
+            <a:spAutoFit/>
+          </a:bodyPr>
+          <a:lstStyle/>
+          <a:p>
+            <a:pPr algn="r">
+              <a:spcBef>
+                <a:spcPts val="0"/>
+              </a:spcBef>
+              <a:spcAft>
+                <a:spcPts val="0"/>
+              </a:spcAft>
+            </a:pPr>
+            <a:r>
+              <a:rPr sz="1000" b="0">
+                <a:solidFill>
+                  <a:srgbClr val="6B727B"/>
+                </a:solidFill>
+                <a:latin typeface="Calibri"/>
+              </a:rPr>
+              <a:t>7</a:t>
+            </a:r>
+          </a:p>
+        </p:txBody>
+      </p:sp>
+      <p:sp>
+        <p:nvSpPr>
+          <p:cNvPr id="7" name="TextBox 6"/>
+          <p:cNvSpPr txBox="1"/>
+          <p:nvPr/>
+        </p:nvSpPr>
+        <p:spPr>
+          <a:xfrm>
+            <a:off x="822960" y="1536192"/>
+            <a:ext cx="10545775" cy="4389120"/>
+          </a:xfrm>
+          <a:prstGeom prst="rect">
+            <a:avLst/>
+          </a:prstGeom>
+          <a:noFill/>
+        </p:spPr>
+        <p:txBody>
+          <a:bodyPr wrap="square" anchor="ctr" lIns="0" rIns="0" tIns="0" bIns="0">
+            <a:spAutoFit/>
+          </a:bodyPr>
+          <a:lstStyle/>
+          <a:p>
+            <a:pPr marL="274320" indent="-274320">
+              <a:lnSpc>
+                <a:spcPct val="105000"/>
+              </a:lnSpc>
+              <a:spcBef>
+                <a:spcPts val="0"/>
+              </a:spcBef>
+              <a:spcAft>
+                <a:spcPts val="300"/>
+              </a:spcAft>
+              <a:buClr>
+                <a:srgbClr val="1E8E4F"/>
+              </a:buClr>
+              <a:buSzPct val="85000"/>
+              <a:buFont typeface="Arial"/>
+              <a:buChar char="▪"/>
+            </a:pPr>
+            <a:r>
+              <a:rPr sz="2000" b="0">
                 <a:solidFill>
                   <a:srgbClr val="1F364D"/>
                 </a:solidFill>
-              </a:rPr>
-              <a:t>Indexed heap: position map -&gt; O(log n) updates</a:t>
-            </a:r>
-          </a:p>
-          <a:p>
-            <a:pPr lvl="1">
-              <a:spcAft>
-                <a:spcPts val="1000"/>
-              </a:spcAft>
-            </a:pPr>
-            <a:r>
-              <a:rPr sz="1600">
-                <a:solidFill>
-                  <a:srgbClr val="444444"/>
-                </a:solidFill>
+                <a:latin typeface="Calibri"/>
+              </a:rPr>
+              <a:t>Indexed heap: position map  →  O(log n) updates</a:t>
+            </a:r>
+          </a:p>
+          <a:p>
+            <a:pPr marL="676656" indent="-256032">
+              <a:lnSpc>
+                <a:spcPct val="105000"/>
+              </a:lnSpc>
+              <a:spcBef>
+                <a:spcPts val="500"/>
+              </a:spcBef>
+              <a:spcAft>
+                <a:spcPts val="300"/>
+              </a:spcAft>
+              <a:buClr>
+                <a:srgbClr val="6B727B"/>
+              </a:buClr>
+              <a:buSzPct val="85000"/>
+              <a:buFont typeface="Arial"/>
+              <a:buChar char="–"/>
+            </a:pPr>
+            <a:r>
+              <a:rPr sz="1600" b="0">
+                <a:solidFill>
+                  <a:srgbClr val="333A42"/>
+                </a:solidFill>
+                <a:latin typeface="Calibri"/>
               </a:rPr>
               <a:t>Floyd's heapify: O(n) bulk build</a:t>
             </a:r>
           </a:p>
           <a:p>
-            <a:pPr lvl="1">
-              <a:spcAft>
-                <a:spcPts val="1000"/>
-              </a:spcAft>
-            </a:pPr>
-            <a:r>
-              <a:rPr sz="1600">
-                <a:solidFill>
-                  <a:srgbClr val="444444"/>
-                </a:solidFill>
+            <a:pPr marL="676656" indent="-256032">
+              <a:lnSpc>
+                <a:spcPct val="105000"/>
+              </a:lnSpc>
+              <a:spcBef>
+                <a:spcPts val="500"/>
+              </a:spcBef>
+              <a:spcAft>
+                <a:spcPts val="300"/>
+              </a:spcAft>
+              <a:buClr>
+                <a:srgbClr val="6B727B"/>
+              </a:buClr>
+              <a:buSzPct val="85000"/>
+              <a:buFont typeface="Arial"/>
+              <a:buChar char="–"/>
+            </a:pPr>
+            <a:r>
+              <a:rPr sz="1600" b="0">
+                <a:solidFill>
+                  <a:srgbClr val="333A42"/>
+                </a:solidFill>
+                <a:latin typeface="Calibri"/>
               </a:rPr>
               <a:t>Top-k via frontier walk: O(k log k), not a full sort</a:t>
             </a:r>
           </a:p>
           <a:p>
-            <a:pPr>
-              <a:spcAft>
-                <a:spcPts val="1000"/>
-              </a:spcAft>
-            </a:pPr>
-            <a:r>
-              <a:rPr sz="2000">
+            <a:pPr marL="274320" indent="-274320">
+              <a:lnSpc>
+                <a:spcPct val="105000"/>
+              </a:lnSpc>
+              <a:spcBef>
+                <a:spcPts val="1300"/>
+              </a:spcBef>
+              <a:spcAft>
+                <a:spcPts val="300"/>
+              </a:spcAft>
+              <a:buClr>
+                <a:srgbClr val="1E8E4F"/>
+              </a:buClr>
+              <a:buSzPct val="85000"/>
+              <a:buFont typeface="Arial"/>
+              <a:buChar char="▪"/>
+            </a:pPr>
+            <a:r>
+              <a:rPr sz="2000" b="0">
                 <a:solidFill>
                   <a:srgbClr val="1F364D"/>
                 </a:solidFill>
+                <a:latin typeface="Calibri"/>
               </a:rPr>
               <a:t>Open-addressing hash table</a:t>
             </a:r>
           </a:p>
           <a:p>
-            <a:pPr lvl="1">
-              <a:spcAft>
-                <a:spcPts val="1000"/>
-              </a:spcAft>
-            </a:pPr>
-            <a:r>
-              <a:rPr sz="1600">
-                <a:solidFill>
-                  <a:srgbClr val="444444"/>
-                </a:solidFill>
+            <a:pPr marL="676656" indent="-256032">
+              <a:lnSpc>
+                <a:spcPct val="105000"/>
+              </a:lnSpc>
+              <a:spcBef>
+                <a:spcPts val="500"/>
+              </a:spcBef>
+              <a:spcAft>
+                <a:spcPts val="300"/>
+              </a:spcAft>
+              <a:buClr>
+                <a:srgbClr val="6B727B"/>
+              </a:buClr>
+              <a:buSzPct val="85000"/>
+              <a:buFont typeface="Arial"/>
+              <a:buChar char="–"/>
+            </a:pPr>
+            <a:r>
+              <a:rPr sz="1600" b="0">
+                <a:solidFill>
+                  <a:srgbClr val="333A42"/>
+                </a:solidFill>
+                <a:latin typeface="Calibri"/>
               </a:rPr>
               <a:t>Perturbed probing, load cap 2/3, tombstones, flat arrays</a:t>
             </a:r>
           </a:p>
           <a:p>
-            <a:pPr>
-              <a:spcAft>
-                <a:spcPts val="1000"/>
-              </a:spcAft>
-            </a:pPr>
-            <a:r>
-              <a:rPr sz="2000">
+            <a:pPr marL="274320" indent="-274320">
+              <a:lnSpc>
+                <a:spcPct val="105000"/>
+              </a:lnSpc>
+              <a:spcBef>
+                <a:spcPts val="1300"/>
+              </a:spcBef>
+              <a:spcAft>
+                <a:spcPts val="300"/>
+              </a:spcAft>
+              <a:buClr>
+                <a:srgbClr val="1E8E4F"/>
+              </a:buClr>
+              <a:buSzPct val="85000"/>
+              <a:buFont typeface="Arial"/>
+              <a:buChar char="▪"/>
+            </a:pPr>
+            <a:r>
+              <a:rPr sz="2000" b="0">
                 <a:solidFill>
                   <a:srgbClr val="1F364D"/>
                 </a:solidFill>
-              </a:rPr>
-              <a:t>Skip list -&gt; sorted array + C-level bisect</a:t>
-            </a:r>
-          </a:p>
-          <a:p>
-            <a:pPr lvl="1">
-              <a:spcAft>
-                <a:spcPts val="1000"/>
-              </a:spcAft>
-            </a:pPr>
-            <a:r>
-              <a:rPr sz="1600">
-                <a:solidFill>
-                  <a:srgbClr val="444444"/>
-                </a:solidFill>
+                <a:latin typeface="Calibri"/>
+              </a:rPr>
+              <a:t>Skip list  →  sorted array + C-level bisect</a:t>
+            </a:r>
+          </a:p>
+          <a:p>
+            <a:pPr marL="676656" indent="-256032">
+              <a:lnSpc>
+                <a:spcPct val="105000"/>
+              </a:lnSpc>
+              <a:spcBef>
+                <a:spcPts val="500"/>
+              </a:spcBef>
+              <a:spcAft>
+                <a:spcPts val="300"/>
+              </a:spcAft>
+              <a:buClr>
+                <a:srgbClr val="6B727B"/>
+              </a:buClr>
+              <a:buSzPct val="85000"/>
+              <a:buFont typeface="Arial"/>
+              <a:buChar char="–"/>
+            </a:pPr>
+            <a:r>
+              <a:rPr sz="1600" b="0">
+                <a:solidFill>
+                  <a:srgbClr val="333A42"/>
+                </a:solidFill>
+                <a:latin typeface="Calibri"/>
               </a:rPr>
               <a:t>Deliberate read/write trade-off for read-heavy workloads</a:t>
             </a:r>
           </a:p>
           <a:p>
-            <a:pPr>
-              <a:spcAft>
-                <a:spcPts val="1000"/>
-              </a:spcAft>
-            </a:pPr>
-            <a:r>
-              <a:rPr sz="2000">
+            <a:pPr marL="274320" indent="-274320">
+              <a:lnSpc>
+                <a:spcPct val="105000"/>
+              </a:lnSpc>
+              <a:spcBef>
+                <a:spcPts val="1300"/>
+              </a:spcBef>
+              <a:spcAft>
+                <a:spcPts val="300"/>
+              </a:spcAft>
+              <a:buClr>
+                <a:srgbClr val="1E8E4F"/>
+              </a:buClr>
+              <a:buSzPct val="85000"/>
+              <a:buFont typeface="Arial"/>
+              <a:buChar char="▪"/>
+            </a:pPr>
+            <a:r>
+              <a:rPr sz="2000" b="0">
                 <a:solidFill>
                   <a:srgbClr val="1F364D"/>
                 </a:solidFill>
+                <a:latin typeface="Calibri"/>
               </a:rPr>
               <a:t>bulk_load, __slots__, scan-resistant LRU cache</a:t>
             </a:r>
@@ -6147,8 +9149,8 @@
         </p:nvSpPr>
         <p:spPr>
           <a:xfrm>
-            <a:off x="457200" y="320040"/>
-            <a:ext cx="8229600" cy="914400"/>
+            <a:off x="822960" y="475488"/>
+            <a:ext cx="10545775" cy="658368"/>
           </a:xfrm>
           <a:prstGeom prst="rect">
             <a:avLst/>
@@ -6156,16 +9158,25 @@
           <a:noFill/>
         </p:spPr>
         <p:txBody>
-          <a:bodyPr wrap="none">
+          <a:bodyPr wrap="square" anchor="t" lIns="0" rIns="0" tIns="0" bIns="0">
             <a:spAutoFit/>
           </a:bodyPr>
           <a:lstStyle/>
           <a:p>
-            <a:r>
-              <a:rPr sz="3000" b="1">
+            <a:pPr>
+              <a:spcBef>
+                <a:spcPts val="0"/>
+              </a:spcBef>
+              <a:spcAft>
+                <a:spcPts val="0"/>
+              </a:spcAft>
+            </a:pPr>
+            <a:r>
+              <a:rPr sz="2800" b="1">
                 <a:solidFill>
                   <a:srgbClr val="1F364D"/>
                 </a:solidFill>
+                <a:latin typeface="Calibri"/>
               </a:rPr>
               <a:t>Two Instructive Failures</a:t>
             </a:r>
@@ -6174,14 +9185,102 @@
       </p:sp>
       <p:sp>
         <p:nvSpPr>
-          <p:cNvPr id="3" name="TextBox 2"/>
+          <p:cNvPr id="3" name="Rectangle 2"/>
+          <p:cNvSpPr/>
+          <p:nvPr/>
+        </p:nvSpPr>
+        <p:spPr>
+          <a:xfrm>
+            <a:off x="822960" y="1170432"/>
+            <a:ext cx="1371600" cy="50292"/>
+          </a:xfrm>
+          <a:prstGeom prst="rect">
+            <a:avLst/>
+          </a:prstGeom>
+          <a:solidFill>
+            <a:srgbClr val="1E8E4F"/>
+          </a:solidFill>
+          <a:ln>
+            <a:noFill/>
+          </a:ln>
+          <a:effectLst/>
+        </p:spPr>
+        <p:style>
+          <a:lnRef idx="1">
+            <a:schemeClr val="accent1"/>
+          </a:lnRef>
+          <a:fillRef idx="3">
+            <a:schemeClr val="accent1"/>
+          </a:fillRef>
+          <a:effectRef idx="2">
+            <a:schemeClr val="accent1"/>
+          </a:effectRef>
+          <a:fontRef idx="minor">
+            <a:schemeClr val="lt1"/>
+          </a:fontRef>
+        </p:style>
+        <p:txBody>
+          <a:bodyPr rtlCol="0" anchor="ctr"/>
+          <a:lstStyle/>
+          <a:p>
+            <a:pPr algn="ctr"/>
+          </a:p>
+        </p:txBody>
+      </p:sp>
+      <p:sp>
+        <p:nvSpPr>
+          <p:cNvPr id="4" name="Rectangle 3"/>
+          <p:cNvSpPr/>
+          <p:nvPr/>
+        </p:nvSpPr>
+        <p:spPr>
+          <a:xfrm>
+            <a:off x="822960" y="6089904"/>
+            <a:ext cx="10545775" cy="10972"/>
+          </a:xfrm>
+          <a:prstGeom prst="rect">
+            <a:avLst/>
+          </a:prstGeom>
+          <a:solidFill>
+            <a:srgbClr val="D8DCE1"/>
+          </a:solidFill>
+          <a:ln>
+            <a:noFill/>
+          </a:ln>
+          <a:effectLst/>
+        </p:spPr>
+        <p:style>
+          <a:lnRef idx="1">
+            <a:schemeClr val="accent1"/>
+          </a:lnRef>
+          <a:fillRef idx="3">
+            <a:schemeClr val="accent1"/>
+          </a:fillRef>
+          <a:effectRef idx="2">
+            <a:schemeClr val="accent1"/>
+          </a:effectRef>
+          <a:fontRef idx="minor">
+            <a:schemeClr val="lt1"/>
+          </a:fontRef>
+        </p:style>
+        <p:txBody>
+          <a:bodyPr rtlCol="0" anchor="ctr"/>
+          <a:lstStyle/>
+          <a:p>
+            <a:pPr algn="ctr"/>
+          </a:p>
+        </p:txBody>
+      </p:sp>
+      <p:sp>
+        <p:nvSpPr>
+          <p:cNvPr id="5" name="TextBox 4"/>
           <p:cNvSpPr txBox="1"/>
           <p:nvPr/>
         </p:nvSpPr>
         <p:spPr>
           <a:xfrm>
-            <a:off x="640080" y="1371600"/>
-            <a:ext cx="7863840" cy="4846320"/>
+            <a:off x="822960" y="6236208"/>
+            <a:ext cx="9814255" cy="256032"/>
           </a:xfrm>
           <a:prstGeom prst="rect">
             <a:avLst/>
@@ -6189,111 +9288,286 @@
           <a:noFill/>
         </p:spPr>
         <p:txBody>
-          <a:bodyPr wrap="square">
+          <a:bodyPr wrap="square" anchor="t" lIns="0" rIns="0" tIns="0" bIns="0">
             <a:spAutoFit/>
           </a:bodyPr>
           <a:lstStyle/>
           <a:p>
             <a:pPr>
-              <a:spcAft>
-                <a:spcPts val="1000"/>
-              </a:spcAft>
-            </a:pPr>
-            <a:r>
-              <a:rPr sz="2000">
+              <a:spcBef>
+                <a:spcPts val="0"/>
+              </a:spcBef>
+              <a:spcAft>
+                <a:spcPts val="0"/>
+              </a:spcAft>
+            </a:pPr>
+            <a:r>
+              <a:rPr sz="1000" b="0">
+                <a:solidFill>
+                  <a:srgbClr val="6B727B"/>
+                </a:solidFill>
+                <a:latin typeface="Calibri"/>
+              </a:rPr>
+              <a:t>Rahul Solanki  |  MSCS-532-B01  |  Dynamic Inventory Management</a:t>
+            </a:r>
+          </a:p>
+        </p:txBody>
+      </p:sp>
+      <p:sp>
+        <p:nvSpPr>
+          <p:cNvPr id="6" name="TextBox 5"/>
+          <p:cNvSpPr txBox="1"/>
+          <p:nvPr/>
+        </p:nvSpPr>
+        <p:spPr>
+          <a:xfrm>
+            <a:off x="10637215" y="6236208"/>
+            <a:ext cx="731520" cy="256032"/>
+          </a:xfrm>
+          <a:prstGeom prst="rect">
+            <a:avLst/>
+          </a:prstGeom>
+          <a:noFill/>
+        </p:spPr>
+        <p:txBody>
+          <a:bodyPr wrap="square" anchor="t" lIns="0" rIns="0" tIns="0" bIns="0">
+            <a:spAutoFit/>
+          </a:bodyPr>
+          <a:lstStyle/>
+          <a:p>
+            <a:pPr algn="r">
+              <a:spcBef>
+                <a:spcPts val="0"/>
+              </a:spcBef>
+              <a:spcAft>
+                <a:spcPts val="0"/>
+              </a:spcAft>
+            </a:pPr>
+            <a:r>
+              <a:rPr sz="1000" b="0">
+                <a:solidFill>
+                  <a:srgbClr val="6B727B"/>
+                </a:solidFill>
+                <a:latin typeface="Calibri"/>
+              </a:rPr>
+              <a:t>8</a:t>
+            </a:r>
+          </a:p>
+        </p:txBody>
+      </p:sp>
+      <p:sp>
+        <p:nvSpPr>
+          <p:cNvPr id="7" name="TextBox 6"/>
+          <p:cNvSpPr txBox="1"/>
+          <p:nvPr/>
+        </p:nvSpPr>
+        <p:spPr>
+          <a:xfrm>
+            <a:off x="822960" y="1536192"/>
+            <a:ext cx="10545775" cy="4389120"/>
+          </a:xfrm>
+          <a:prstGeom prst="rect">
+            <a:avLst/>
+          </a:prstGeom>
+          <a:noFill/>
+        </p:spPr>
+        <p:txBody>
+          <a:bodyPr wrap="square" anchor="ctr" lIns="0" rIns="0" tIns="0" bIns="0">
+            <a:spAutoFit/>
+          </a:bodyPr>
+          <a:lstStyle/>
+          <a:p>
+            <a:pPr marL="274320" indent="-274320">
+              <a:lnSpc>
+                <a:spcPct val="105000"/>
+              </a:lnSpc>
+              <a:spcBef>
+                <a:spcPts val="0"/>
+              </a:spcBef>
+              <a:spcAft>
+                <a:spcPts val="300"/>
+              </a:spcAft>
+              <a:buClr>
+                <a:srgbClr val="1E8E4F"/>
+              </a:buClr>
+              <a:buSzPct val="85000"/>
+              <a:buFont typeface="Arial"/>
+              <a:buChar char="▪"/>
+            </a:pPr>
+            <a:r>
+              <a:rPr sz="2000" b="0">
                 <a:solidFill>
                   <a:srgbClr val="1F364D"/>
                 </a:solidFill>
+                <a:latin typeface="Calibri"/>
               </a:rPr>
               <a:t>Generator-based probing made lookups SLOWER</a:t>
             </a:r>
           </a:p>
           <a:p>
-            <a:pPr lvl="1">
-              <a:spcAft>
-                <a:spcPts val="1000"/>
-              </a:spcAft>
-            </a:pPr>
-            <a:r>
-              <a:rPr sz="1600">
-                <a:solidFill>
-                  <a:srgbClr val="444444"/>
-                </a:solidFill>
+            <a:pPr marL="676656" indent="-256032">
+              <a:lnSpc>
+                <a:spcPct val="105000"/>
+              </a:lnSpc>
+              <a:spcBef>
+                <a:spcPts val="500"/>
+              </a:spcBef>
+              <a:spcAft>
+                <a:spcPts val="300"/>
+              </a:spcAft>
+              <a:buClr>
+                <a:srgbClr val="6B727B"/>
+              </a:buClr>
+              <a:buSzPct val="85000"/>
+              <a:buFont typeface="Arial"/>
+              <a:buChar char="–"/>
+            </a:pPr>
+            <a:r>
+              <a:rPr sz="1600" b="0">
+                <a:solidFill>
+                  <a:srgbClr val="333A42"/>
+                </a:solidFill>
+                <a:latin typeface="Calibri"/>
               </a:rPr>
               <a:t>One Python frame per probe step &gt; entire chaining cost</a:t>
             </a:r>
           </a:p>
           <a:p>
-            <a:pPr lvl="1">
-              <a:spcAft>
-                <a:spcPts val="1000"/>
-              </a:spcAft>
-            </a:pPr>
-            <a:r>
-              <a:rPr sz="1600">
-                <a:solidFill>
-                  <a:srgbClr val="444444"/>
-                </a:solidFill>
+            <a:pPr marL="676656" indent="-256032">
+              <a:lnSpc>
+                <a:spcPct val="105000"/>
+              </a:lnSpc>
+              <a:spcBef>
+                <a:spcPts val="500"/>
+              </a:spcBef>
+              <a:spcAft>
+                <a:spcPts val="300"/>
+              </a:spcAft>
+              <a:buClr>
+                <a:srgbClr val="6B727B"/>
+              </a:buClr>
+              <a:buSzPct val="85000"/>
+              <a:buFont typeface="Arial"/>
+              <a:buChar char="–"/>
+            </a:pPr>
+            <a:r>
+              <a:rPr sz="1600" b="0">
+                <a:solidFill>
+                  <a:srgbClr val="333A42"/>
+                </a:solidFill>
+                <a:latin typeface="Calibri"/>
               </a:rPr>
               <a:t>Fix: inline the probe loop</a:t>
             </a:r>
           </a:p>
           <a:p>
-            <a:pPr>
-              <a:spcAft>
-                <a:spcPts val="1000"/>
-              </a:spcAft>
-            </a:pPr>
-            <a:r>
-              <a:rPr sz="2000">
+            <a:pPr marL="274320" indent="-274320">
+              <a:lnSpc>
+                <a:spcPct val="105000"/>
+              </a:lnSpc>
+              <a:spcBef>
+                <a:spcPts val="1300"/>
+              </a:spcBef>
+              <a:spcAft>
+                <a:spcPts val="300"/>
+              </a:spcAft>
+              <a:buClr>
+                <a:srgbClr val="1E8E4F"/>
+              </a:buClr>
+              <a:buSzPct val="85000"/>
+              <a:buFont typeface="Arial"/>
+              <a:buChar char="▪"/>
+            </a:pPr>
+            <a:r>
+              <a:rPr sz="2000" b="0">
                 <a:solidFill>
                   <a:srgbClr val="1F364D"/>
                 </a:solidFill>
+                <a:latin typeface="Calibri"/>
               </a:rPr>
               <a:t>Range queries polluted the LRU cache</a:t>
             </a:r>
           </a:p>
           <a:p>
-            <a:pPr lvl="1">
-              <a:spcAft>
-                <a:spcPts val="1000"/>
-              </a:spcAft>
-            </a:pPr>
-            <a:r>
-              <a:rPr sz="1600">
-                <a:solidFill>
-                  <a:srgbClr val="444444"/>
-                </a:solidFill>
+            <a:pPr marL="676656" indent="-256032">
+              <a:lnSpc>
+                <a:spcPct val="105000"/>
+              </a:lnSpc>
+              <a:spcBef>
+                <a:spcPts val="500"/>
+              </a:spcBef>
+              <a:spcAft>
+                <a:spcPts val="300"/>
+              </a:spcAft>
+              <a:buClr>
+                <a:srgbClr val="6B727B"/>
+              </a:buClr>
+              <a:buSzPct val="85000"/>
+              <a:buFont typeface="Arial"/>
+              <a:buChar char="–"/>
+            </a:pPr>
+            <a:r>
+              <a:rPr sz="1600" b="0">
+                <a:solidFill>
+                  <a:srgbClr val="333A42"/>
+                </a:solidFill>
+                <a:latin typeface="Calibri"/>
               </a:rPr>
               <a:t>Cold scan keys evicted the hot working set</a:t>
             </a:r>
           </a:p>
           <a:p>
-            <a:pPr lvl="1">
-              <a:spcAft>
-                <a:spcPts val="1000"/>
-              </a:spcAft>
-            </a:pPr>
-            <a:r>
-              <a:rPr sz="1600">
-                <a:solidFill>
-                  <a:srgbClr val="444444"/>
-                </a:solidFill>
+            <a:pPr marL="676656" indent="-256032">
+              <a:lnSpc>
+                <a:spcPct val="105000"/>
+              </a:lnSpc>
+              <a:spcBef>
+                <a:spcPts val="500"/>
+              </a:spcBef>
+              <a:spcAft>
+                <a:spcPts val="300"/>
+              </a:spcAft>
+              <a:buClr>
+                <a:srgbClr val="6B727B"/>
+              </a:buClr>
+              <a:buSzPct val="85000"/>
+              <a:buFont typeface="Arial"/>
+              <a:buChar char="–"/>
+            </a:pPr>
+            <a:r>
+              <a:rPr sz="1600" b="0">
+                <a:solidFill>
+                  <a:srgbClr val="333A42"/>
+                </a:solidFill>
+                <a:latin typeface="Calibri"/>
               </a:rPr>
               <a:t>Fix: scans bypass the cache (scan-resistant policy)</a:t>
             </a:r>
           </a:p>
           <a:p>
-            <a:pPr>
-              <a:spcAft>
-                <a:spcPts val="1000"/>
-              </a:spcAft>
-            </a:pPr>
-            <a:r>
-              <a:rPr sz="2000">
+            <a:pPr marL="274320" indent="-274320">
+              <a:lnSpc>
+                <a:spcPct val="105000"/>
+              </a:lnSpc>
+              <a:spcBef>
+                <a:spcPts val="1300"/>
+              </a:spcBef>
+              <a:spcAft>
+                <a:spcPts val="300"/>
+              </a:spcAft>
+              <a:buClr>
+                <a:srgbClr val="1E8E4F"/>
+              </a:buClr>
+              <a:buSzPct val="85000"/>
+              <a:buFont typeface="Arial"/>
+              <a:buChar char="▪"/>
+            </a:pPr>
+            <a:r>
+              <a:rPr sz="2000" b="0">
                 <a:solidFill>
                   <a:srgbClr val="1F364D"/>
                 </a:solidFill>
+                <a:latin typeface="Calibri"/>
               </a:rPr>
               <a:t>Lesson: in interpreted code, constant factors are design</a:t>
             </a:r>
@@ -6326,8 +9600,8 @@
         </p:nvSpPr>
         <p:spPr>
           <a:xfrm>
-            <a:off x="457200" y="320040"/>
-            <a:ext cx="8229600" cy="914400"/>
+            <a:off x="822960" y="475488"/>
+            <a:ext cx="10545775" cy="658368"/>
           </a:xfrm>
           <a:prstGeom prst="rect">
             <a:avLst/>
@@ -6335,16 +9609,25 @@
           <a:noFill/>
         </p:spPr>
         <p:txBody>
-          <a:bodyPr wrap="none">
+          <a:bodyPr wrap="square" anchor="t" lIns="0" rIns="0" tIns="0" bIns="0">
             <a:spAutoFit/>
           </a:bodyPr>
           <a:lstStyle/>
           <a:p>
-            <a:r>
-              <a:rPr sz="3000" b="1">
+            <a:pPr>
+              <a:spcBef>
+                <a:spcPts val="0"/>
+              </a:spcBef>
+              <a:spcAft>
+                <a:spcPts val="0"/>
+              </a:spcAft>
+            </a:pPr>
+            <a:r>
+              <a:rPr sz="2800" b="1">
                 <a:solidFill>
                   <a:srgbClr val="1F364D"/>
                 </a:solidFill>
+                <a:latin typeface="Calibri"/>
               </a:rPr>
               <a:t>Results: Speedup vs Baseline (100k products)</a:t>
             </a:r>
@@ -6353,14 +9636,102 @@
       </p:sp>
       <p:sp>
         <p:nvSpPr>
-          <p:cNvPr id="3" name="TextBox 2"/>
+          <p:cNvPr id="3" name="Rectangle 2"/>
+          <p:cNvSpPr/>
+          <p:nvPr/>
+        </p:nvSpPr>
+        <p:spPr>
+          <a:xfrm>
+            <a:off x="822960" y="1170432"/>
+            <a:ext cx="1371600" cy="50292"/>
+          </a:xfrm>
+          <a:prstGeom prst="rect">
+            <a:avLst/>
+          </a:prstGeom>
+          <a:solidFill>
+            <a:srgbClr val="1E8E4F"/>
+          </a:solidFill>
+          <a:ln>
+            <a:noFill/>
+          </a:ln>
+          <a:effectLst/>
+        </p:spPr>
+        <p:style>
+          <a:lnRef idx="1">
+            <a:schemeClr val="accent1"/>
+          </a:lnRef>
+          <a:fillRef idx="3">
+            <a:schemeClr val="accent1"/>
+          </a:fillRef>
+          <a:effectRef idx="2">
+            <a:schemeClr val="accent1"/>
+          </a:effectRef>
+          <a:fontRef idx="minor">
+            <a:schemeClr val="lt1"/>
+          </a:fontRef>
+        </p:style>
+        <p:txBody>
+          <a:bodyPr rtlCol="0" anchor="ctr"/>
+          <a:lstStyle/>
+          <a:p>
+            <a:pPr algn="ctr"/>
+          </a:p>
+        </p:txBody>
+      </p:sp>
+      <p:sp>
+        <p:nvSpPr>
+          <p:cNvPr id="4" name="Rectangle 3"/>
+          <p:cNvSpPr/>
+          <p:nvPr/>
+        </p:nvSpPr>
+        <p:spPr>
+          <a:xfrm>
+            <a:off x="822960" y="6089904"/>
+            <a:ext cx="10545775" cy="10972"/>
+          </a:xfrm>
+          <a:prstGeom prst="rect">
+            <a:avLst/>
+          </a:prstGeom>
+          <a:solidFill>
+            <a:srgbClr val="D8DCE1"/>
+          </a:solidFill>
+          <a:ln>
+            <a:noFill/>
+          </a:ln>
+          <a:effectLst/>
+        </p:spPr>
+        <p:style>
+          <a:lnRef idx="1">
+            <a:schemeClr val="accent1"/>
+          </a:lnRef>
+          <a:fillRef idx="3">
+            <a:schemeClr val="accent1"/>
+          </a:fillRef>
+          <a:effectRef idx="2">
+            <a:schemeClr val="accent1"/>
+          </a:effectRef>
+          <a:fontRef idx="minor">
+            <a:schemeClr val="lt1"/>
+          </a:fontRef>
+        </p:style>
+        <p:txBody>
+          <a:bodyPr rtlCol="0" anchor="ctr"/>
+          <a:lstStyle/>
+          <a:p>
+            <a:pPr algn="ctr"/>
+          </a:p>
+        </p:txBody>
+      </p:sp>
+      <p:sp>
+        <p:nvSpPr>
+          <p:cNvPr id="5" name="TextBox 4"/>
           <p:cNvSpPr txBox="1"/>
           <p:nvPr/>
         </p:nvSpPr>
         <p:spPr>
           <a:xfrm>
-            <a:off x="640080" y="1371600"/>
-            <a:ext cx="7863840" cy="4846320"/>
+            <a:off x="822960" y="6236208"/>
+            <a:ext cx="9814255" cy="256032"/>
           </a:xfrm>
           <a:prstGeom prst="rect">
             <a:avLst/>
@@ -6368,117 +9739,652 @@
           <a:noFill/>
         </p:spPr>
         <p:txBody>
-          <a:bodyPr wrap="square">
+          <a:bodyPr wrap="square" anchor="t" lIns="0" rIns="0" tIns="0" bIns="0">
             <a:spAutoFit/>
           </a:bodyPr>
           <a:lstStyle/>
           <a:p>
             <a:pPr>
-              <a:spcAft>
-                <a:spcPts val="1000"/>
-              </a:spcAft>
-            </a:pPr>
-            <a:r>
-              <a:rPr sz="2000">
-                <a:solidFill>
-                  <a:srgbClr val="1F364D"/>
-                </a:solidFill>
-              </a:rPr>
-              <a:t>Quantity updates:  2,750x   (O(n) scan removed)</a:t>
-            </a:r>
-          </a:p>
-          <a:p>
-            <a:pPr>
-              <a:spcAft>
-                <a:spcPts val="1000"/>
-              </a:spcAft>
-            </a:pPr>
-            <a:r>
-              <a:rPr sz="2000">
-                <a:solidFill>
-                  <a:srgbClr val="1F364D"/>
-                </a:solidFill>
-              </a:rPr>
-              <a:t>Low-stock queries:  3,403x   (sort removed)</a:t>
-            </a:r>
-          </a:p>
-          <a:p>
-            <a:pPr>
-              <a:spcAft>
-                <a:spcPts val="1000"/>
-              </a:spcAft>
-            </a:pPr>
-            <a:r>
-              <a:rPr sz="2000">
-                <a:solidFill>
-                  <a:srgbClr val="1F364D"/>
-                </a:solidFill>
-              </a:rPr>
-              <a:t>Bulk load:  2.4x</a:t>
-            </a:r>
-          </a:p>
-          <a:p>
-            <a:pPr>
-              <a:spcAft>
-                <a:spcPts val="1000"/>
-              </a:spcAft>
-            </a:pPr>
-            <a:r>
-              <a:rPr sz="2000">
-                <a:solidFill>
-                  <a:srgbClr val="1F364D"/>
-                </a:solidFill>
-              </a:rPr>
-              <a:t>Skewed lookups:  1.4x</a:t>
-            </a:r>
-          </a:p>
-          <a:p>
-            <a:pPr>
-              <a:spcAft>
-                <a:spcPts val="1000"/>
-              </a:spcAft>
-            </a:pPr>
-            <a:r>
-              <a:rPr sz="2000">
-                <a:solidFill>
-                  <a:srgbClr val="1F364D"/>
-                </a:solidFill>
-              </a:rPr>
-              <a:t>Price-range queries:  1.6x</a:t>
-            </a:r>
-          </a:p>
-          <a:p>
-            <a:pPr>
-              <a:spcAft>
-                <a:spcPts val="1000"/>
-              </a:spcAft>
-            </a:pPr>
-            <a:r>
-              <a:rPr sz="2000">
-                <a:solidFill>
-                  <a:srgbClr val="1F364D"/>
-                </a:solidFill>
-              </a:rPr>
-              <a:t>Peak memory:  69 MiB -&gt; 58 MiB</a:t>
-            </a:r>
-          </a:p>
-          <a:p>
-            <a:pPr>
-              <a:spcAft>
-                <a:spcPts val="1000"/>
-              </a:spcAft>
-            </a:pPr>
-            <a:r>
-              <a:rPr sz="2000">
-                <a:solidFill>
-                  <a:srgbClr val="1F364D"/>
-                </a:solidFill>
-              </a:rPr>
-              <a:t>65/65 tests pass on both implementations</a:t>
-            </a:r>
-          </a:p>
-        </p:txBody>
-      </p:sp>
+              <a:spcBef>
+                <a:spcPts val="0"/>
+              </a:spcBef>
+              <a:spcAft>
+                <a:spcPts val="0"/>
+              </a:spcAft>
+            </a:pPr>
+            <a:r>
+              <a:rPr sz="1000" b="0">
+                <a:solidFill>
+                  <a:srgbClr val="6B727B"/>
+                </a:solidFill>
+                <a:latin typeface="Calibri"/>
+              </a:rPr>
+              <a:t>Rahul Solanki  |  MSCS-532-B01  |  Dynamic Inventory Management</a:t>
+            </a:r>
+          </a:p>
+        </p:txBody>
+      </p:sp>
+      <p:sp>
+        <p:nvSpPr>
+          <p:cNvPr id="6" name="TextBox 5"/>
+          <p:cNvSpPr txBox="1"/>
+          <p:nvPr/>
+        </p:nvSpPr>
+        <p:spPr>
+          <a:xfrm>
+            <a:off x="10637215" y="6236208"/>
+            <a:ext cx="731520" cy="256032"/>
+          </a:xfrm>
+          <a:prstGeom prst="rect">
+            <a:avLst/>
+          </a:prstGeom>
+          <a:noFill/>
+        </p:spPr>
+        <p:txBody>
+          <a:bodyPr wrap="square" anchor="t" lIns="0" rIns="0" tIns="0" bIns="0">
+            <a:spAutoFit/>
+          </a:bodyPr>
+          <a:lstStyle/>
+          <a:p>
+            <a:pPr algn="r">
+              <a:spcBef>
+                <a:spcPts val="0"/>
+              </a:spcBef>
+              <a:spcAft>
+                <a:spcPts val="0"/>
+              </a:spcAft>
+            </a:pPr>
+            <a:r>
+              <a:rPr sz="1000" b="0">
+                <a:solidFill>
+                  <a:srgbClr val="6B727B"/>
+                </a:solidFill>
+                <a:latin typeface="Calibri"/>
+              </a:rPr>
+              <a:t>9</a:t>
+            </a:r>
+          </a:p>
+        </p:txBody>
+      </p:sp>
+      <p:graphicFrame>
+        <p:nvGraphicFramePr>
+          <p:cNvPr id="7" name="Table 6"/>
+          <p:cNvGraphicFramePr>
+            <a:graphicFrameLocks noGrp="1"/>
+          </p:cNvGraphicFramePr>
+          <p:nvPr/>
+        </p:nvGraphicFramePr>
+        <p:xfrm>
+          <a:off x="1158087" y="2121408"/>
+          <a:ext cx="9875520" cy="3218688"/>
+        </p:xfrm>
+        <a:graphic>
+          <a:graphicData uri="http://schemas.openxmlformats.org/drawingml/2006/table">
+            <a:tbl>
+              <a:tblPr firstRow="1" bandRow="0">
+                <a:tableStyleId>{2D5ABB26-0587-4C30-8999-92F81FD0307C}</a:tableStyleId>
+              </a:tblPr>
+              <a:tblGrid>
+                <a:gridCol w="3931920"/>
+                <a:gridCol w="2103120"/>
+                <a:gridCol w="3840480"/>
+              </a:tblGrid>
+              <a:tr h="402336">
+                <a:tc>
+                  <a:txBody>
+                    <a:bodyPr/>
+                    <a:lstStyle/>
+                    <a:p>
+                      <a:r>
+                        <a:rPr sz="1500" b="1">
+                          <a:solidFill>
+                            <a:srgbClr val="FFFFFF"/>
+                          </a:solidFill>
+                          <a:latin typeface="Calibri"/>
+                        </a:rPr>
+                        <a:t>Operation</a:t>
+                      </a:r>
+                    </a:p>
+                  </a:txBody>
+                  <a:tcPr anchor="ctr" marL="128016" marR="128016" marT="0" marB="0">
+                    <a:solidFill>
+                      <a:srgbClr val="1F364D"/>
+                    </a:solidFill>
+                  </a:tcPr>
+                </a:tc>
+                <a:tc>
+                  <a:txBody>
+                    <a:bodyPr/>
+                    <a:lstStyle/>
+                    <a:p>
+                      <a:pPr algn="r"/>
+                      <a:r>
+                        <a:rPr sz="1500" b="1">
+                          <a:solidFill>
+                            <a:srgbClr val="FFFFFF"/>
+                          </a:solidFill>
+                          <a:latin typeface="Calibri"/>
+                        </a:rPr>
+                        <a:t>Gain</a:t>
+                      </a:r>
+                    </a:p>
+                  </a:txBody>
+                  <a:tcPr anchor="ctr" marL="128016" marR="128016" marT="0" marB="0">
+                    <a:solidFill>
+                      <a:srgbClr val="1F364D"/>
+                    </a:solidFill>
+                  </a:tcPr>
+                </a:tc>
+                <a:tc>
+                  <a:txBody>
+                    <a:bodyPr/>
+                    <a:lstStyle/>
+                    <a:p>
+                      <a:r>
+                        <a:rPr sz="1500" b="1">
+                          <a:solidFill>
+                            <a:srgbClr val="FFFFFF"/>
+                          </a:solidFill>
+                          <a:latin typeface="Calibri"/>
+                        </a:rPr>
+                        <a:t>What changed</a:t>
+                      </a:r>
+                    </a:p>
+                  </a:txBody>
+                  <a:tcPr anchor="ctr" marL="128016" marR="128016" marT="0" marB="0">
+                    <a:solidFill>
+                      <a:srgbClr val="1F364D"/>
+                    </a:solidFill>
+                  </a:tcPr>
+                </a:tc>
+              </a:tr>
+              <a:tr h="402336">
+                <a:tc>
+                  <a:txBody>
+                    <a:bodyPr/>
+                    <a:lstStyle/>
+                    <a:p>
+                      <a:r>
+                        <a:rPr sz="1500" b="0">
+                          <a:solidFill>
+                            <a:srgbClr val="333A42"/>
+                          </a:solidFill>
+                          <a:latin typeface="Calibri"/>
+                        </a:rPr>
+                        <a:t>Quantity updates</a:t>
+                      </a:r>
+                    </a:p>
+                  </a:txBody>
+                  <a:tcPr anchor="ctr" marL="128016" marR="128016" marT="0" marB="0">
+                    <a:solidFill>
+                      <a:srgbClr val="F4F6F8"/>
+                    </a:solidFill>
+                  </a:tcPr>
+                </a:tc>
+                <a:tc>
+                  <a:txBody>
+                    <a:bodyPr/>
+                    <a:lstStyle/>
+                    <a:p>
+                      <a:pPr algn="r"/>
+                      <a:r>
+                        <a:rPr sz="1500" b="1">
+                          <a:solidFill>
+                            <a:srgbClr val="1E8E4F"/>
+                          </a:solidFill>
+                          <a:latin typeface="Calibri"/>
+                        </a:rPr>
+                        <a:t>2,750x</a:t>
+                      </a:r>
+                    </a:p>
+                  </a:txBody>
+                  <a:tcPr anchor="ctr" marL="128016" marR="128016" marT="0" marB="0">
+                    <a:solidFill>
+                      <a:srgbClr val="F4F6F8"/>
+                    </a:solidFill>
+                  </a:tcPr>
+                </a:tc>
+                <a:tc>
+                  <a:txBody>
+                    <a:bodyPr/>
+                    <a:lstStyle/>
+                    <a:p>
+                      <a:r>
+                        <a:rPr sz="1500" b="0">
+                          <a:solidFill>
+                            <a:srgbClr val="333A42"/>
+                          </a:solidFill>
+                          <a:latin typeface="Calibri"/>
+                        </a:rPr>
+                        <a:t>O(n) scan removed</a:t>
+                      </a:r>
+                    </a:p>
+                  </a:txBody>
+                  <a:tcPr anchor="ctr" marL="128016" marR="128016" marT="0" marB="0">
+                    <a:solidFill>
+                      <a:srgbClr val="F4F6F8"/>
+                    </a:solidFill>
+                  </a:tcPr>
+                </a:tc>
+              </a:tr>
+              <a:tr h="402336">
+                <a:tc>
+                  <a:txBody>
+                    <a:bodyPr/>
+                    <a:lstStyle/>
+                    <a:p>
+                      <a:r>
+                        <a:rPr sz="1500" b="0">
+                          <a:solidFill>
+                            <a:srgbClr val="333A42"/>
+                          </a:solidFill>
+                          <a:latin typeface="Calibri"/>
+                        </a:rPr>
+                        <a:t>Low-stock queries</a:t>
+                      </a:r>
+                    </a:p>
+                  </a:txBody>
+                  <a:tcPr anchor="ctr" marL="128016" marR="128016" marT="0" marB="0">
+                    <a:solidFill>
+                      <a:srgbClr val="FFFFFF"/>
+                    </a:solidFill>
+                  </a:tcPr>
+                </a:tc>
+                <a:tc>
+                  <a:txBody>
+                    <a:bodyPr/>
+                    <a:lstStyle/>
+                    <a:p>
+                      <a:pPr algn="r"/>
+                      <a:r>
+                        <a:rPr sz="1500" b="1">
+                          <a:solidFill>
+                            <a:srgbClr val="1E8E4F"/>
+                          </a:solidFill>
+                          <a:latin typeface="Calibri"/>
+                        </a:rPr>
+                        <a:t>3,403x</a:t>
+                      </a:r>
+                    </a:p>
+                  </a:txBody>
+                  <a:tcPr anchor="ctr" marL="128016" marR="128016" marT="0" marB="0">
+                    <a:solidFill>
+                      <a:srgbClr val="FFFFFF"/>
+                    </a:solidFill>
+                  </a:tcPr>
+                </a:tc>
+                <a:tc>
+                  <a:txBody>
+                    <a:bodyPr/>
+                    <a:lstStyle/>
+                    <a:p>
+                      <a:r>
+                        <a:rPr sz="1500" b="0">
+                          <a:solidFill>
+                            <a:srgbClr val="333A42"/>
+                          </a:solidFill>
+                          <a:latin typeface="Calibri"/>
+                        </a:rPr>
+                        <a:t>Full sort removed</a:t>
+                      </a:r>
+                    </a:p>
+                  </a:txBody>
+                  <a:tcPr anchor="ctr" marL="128016" marR="128016" marT="0" marB="0">
+                    <a:solidFill>
+                      <a:srgbClr val="FFFFFF"/>
+                    </a:solidFill>
+                  </a:tcPr>
+                </a:tc>
+              </a:tr>
+              <a:tr h="402336">
+                <a:tc>
+                  <a:txBody>
+                    <a:bodyPr/>
+                    <a:lstStyle/>
+                    <a:p>
+                      <a:r>
+                        <a:rPr sz="1500" b="0">
+                          <a:solidFill>
+                            <a:srgbClr val="333A42"/>
+                          </a:solidFill>
+                          <a:latin typeface="Calibri"/>
+                        </a:rPr>
+                        <a:t>Bulk load</a:t>
+                      </a:r>
+                    </a:p>
+                  </a:txBody>
+                  <a:tcPr anchor="ctr" marL="128016" marR="128016" marT="0" marB="0">
+                    <a:solidFill>
+                      <a:srgbClr val="F4F6F8"/>
+                    </a:solidFill>
+                  </a:tcPr>
+                </a:tc>
+                <a:tc>
+                  <a:txBody>
+                    <a:bodyPr/>
+                    <a:lstStyle/>
+                    <a:p>
+                      <a:pPr algn="r"/>
+                      <a:r>
+                        <a:rPr sz="1500" b="0">
+                          <a:solidFill>
+                            <a:srgbClr val="333A42"/>
+                          </a:solidFill>
+                          <a:latin typeface="Calibri"/>
+                        </a:rPr>
+                        <a:t>2.4x</a:t>
+                      </a:r>
+                    </a:p>
+                  </a:txBody>
+                  <a:tcPr anchor="ctr" marL="128016" marR="128016" marT="0" marB="0">
+                    <a:solidFill>
+                      <a:srgbClr val="F4F6F8"/>
+                    </a:solidFill>
+                  </a:tcPr>
+                </a:tc>
+                <a:tc>
+                  <a:txBody>
+                    <a:bodyPr/>
+                    <a:lstStyle/>
+                    <a:p>
+                      <a:r>
+                        <a:rPr sz="1500" b="0">
+                          <a:solidFill>
+                            <a:srgbClr val="333A42"/>
+                          </a:solidFill>
+                          <a:latin typeface="Calibri"/>
+                        </a:rPr>
+                        <a:t>Floyd's heapify</a:t>
+                      </a:r>
+                    </a:p>
+                  </a:txBody>
+                  <a:tcPr anchor="ctr" marL="128016" marR="128016" marT="0" marB="0">
+                    <a:solidFill>
+                      <a:srgbClr val="F4F6F8"/>
+                    </a:solidFill>
+                  </a:tcPr>
+                </a:tc>
+              </a:tr>
+              <a:tr h="402336">
+                <a:tc>
+                  <a:txBody>
+                    <a:bodyPr/>
+                    <a:lstStyle/>
+                    <a:p>
+                      <a:r>
+                        <a:rPr sz="1500" b="0">
+                          <a:solidFill>
+                            <a:srgbClr val="333A42"/>
+                          </a:solidFill>
+                          <a:latin typeface="Calibri"/>
+                        </a:rPr>
+                        <a:t>Skewed lookups</a:t>
+                      </a:r>
+                    </a:p>
+                  </a:txBody>
+                  <a:tcPr anchor="ctr" marL="128016" marR="128016" marT="0" marB="0">
+                    <a:solidFill>
+                      <a:srgbClr val="FFFFFF"/>
+                    </a:solidFill>
+                  </a:tcPr>
+                </a:tc>
+                <a:tc>
+                  <a:txBody>
+                    <a:bodyPr/>
+                    <a:lstStyle/>
+                    <a:p>
+                      <a:pPr algn="r"/>
+                      <a:r>
+                        <a:rPr sz="1500" b="0">
+                          <a:solidFill>
+                            <a:srgbClr val="333A42"/>
+                          </a:solidFill>
+                          <a:latin typeface="Calibri"/>
+                        </a:rPr>
+                        <a:t>1.4x</a:t>
+                      </a:r>
+                    </a:p>
+                  </a:txBody>
+                  <a:tcPr anchor="ctr" marL="128016" marR="128016" marT="0" marB="0">
+                    <a:solidFill>
+                      <a:srgbClr val="FFFFFF"/>
+                    </a:solidFill>
+                  </a:tcPr>
+                </a:tc>
+                <a:tc>
+                  <a:txBody>
+                    <a:bodyPr/>
+                    <a:lstStyle/>
+                    <a:p>
+                      <a:r>
+                        <a:rPr sz="1500" b="0">
+                          <a:solidFill>
+                            <a:srgbClr val="333A42"/>
+                          </a:solidFill>
+                          <a:latin typeface="Calibri"/>
+                        </a:rPr>
+                        <a:t>Open addressing + cache</a:t>
+                      </a:r>
+                    </a:p>
+                  </a:txBody>
+                  <a:tcPr anchor="ctr" marL="128016" marR="128016" marT="0" marB="0">
+                    <a:solidFill>
+                      <a:srgbClr val="FFFFFF"/>
+                    </a:solidFill>
+                  </a:tcPr>
+                </a:tc>
+              </a:tr>
+              <a:tr h="402336">
+                <a:tc>
+                  <a:txBody>
+                    <a:bodyPr/>
+                    <a:lstStyle/>
+                    <a:p>
+                      <a:r>
+                        <a:rPr sz="1500" b="0">
+                          <a:solidFill>
+                            <a:srgbClr val="333A42"/>
+                          </a:solidFill>
+                          <a:latin typeface="Calibri"/>
+                        </a:rPr>
+                        <a:t>Price-range queries</a:t>
+                      </a:r>
+                    </a:p>
+                  </a:txBody>
+                  <a:tcPr anchor="ctr" marL="128016" marR="128016" marT="0" marB="0">
+                    <a:solidFill>
+                      <a:srgbClr val="F4F6F8"/>
+                    </a:solidFill>
+                  </a:tcPr>
+                </a:tc>
+                <a:tc>
+                  <a:txBody>
+                    <a:bodyPr/>
+                    <a:lstStyle/>
+                    <a:p>
+                      <a:pPr algn="r"/>
+                      <a:r>
+                        <a:rPr sz="1500" b="0">
+                          <a:solidFill>
+                            <a:srgbClr val="333A42"/>
+                          </a:solidFill>
+                          <a:latin typeface="Calibri"/>
+                        </a:rPr>
+                        <a:t>1.6x</a:t>
+                      </a:r>
+                    </a:p>
+                  </a:txBody>
+                  <a:tcPr anchor="ctr" marL="128016" marR="128016" marT="0" marB="0">
+                    <a:solidFill>
+                      <a:srgbClr val="F4F6F8"/>
+                    </a:solidFill>
+                  </a:tcPr>
+                </a:tc>
+                <a:tc>
+                  <a:txBody>
+                    <a:bodyPr/>
+                    <a:lstStyle/>
+                    <a:p>
+                      <a:r>
+                        <a:rPr sz="1500" b="0">
+                          <a:solidFill>
+                            <a:srgbClr val="333A42"/>
+                          </a:solidFill>
+                          <a:latin typeface="Calibri"/>
+                        </a:rPr>
+                        <a:t>Sorted array + C bisect</a:t>
+                      </a:r>
+                    </a:p>
+                  </a:txBody>
+                  <a:tcPr anchor="ctr" marL="128016" marR="128016" marT="0" marB="0">
+                    <a:solidFill>
+                      <a:srgbClr val="F4F6F8"/>
+                    </a:solidFill>
+                  </a:tcPr>
+                </a:tc>
+              </a:tr>
+              <a:tr h="402336">
+                <a:tc>
+                  <a:txBody>
+                    <a:bodyPr/>
+                    <a:lstStyle/>
+                    <a:p>
+                      <a:r>
+                        <a:rPr sz="1500" b="0">
+                          <a:solidFill>
+                            <a:srgbClr val="333A42"/>
+                          </a:solidFill>
+                          <a:latin typeface="Calibri"/>
+                        </a:rPr>
+                        <a:t>Peak memory</a:t>
+                      </a:r>
+                    </a:p>
+                  </a:txBody>
+                  <a:tcPr anchor="ctr" marL="128016" marR="128016" marT="0" marB="0">
+                    <a:solidFill>
+                      <a:srgbClr val="FFFFFF"/>
+                    </a:solidFill>
+                  </a:tcPr>
+                </a:tc>
+                <a:tc>
+                  <a:txBody>
+                    <a:bodyPr/>
+                    <a:lstStyle/>
+                    <a:p>
+                      <a:pPr algn="r"/>
+                      <a:r>
+                        <a:rPr sz="1500" b="0">
+                          <a:solidFill>
+                            <a:srgbClr val="333A42"/>
+                          </a:solidFill>
+                          <a:latin typeface="Calibri"/>
+                        </a:rPr>
+                        <a:t>69 → 58 MiB</a:t>
+                      </a:r>
+                    </a:p>
+                  </a:txBody>
+                  <a:tcPr anchor="ctr" marL="128016" marR="128016" marT="0" marB="0">
+                    <a:solidFill>
+                      <a:srgbClr val="FFFFFF"/>
+                    </a:solidFill>
+                  </a:tcPr>
+                </a:tc>
+                <a:tc>
+                  <a:txBody>
+                    <a:bodyPr/>
+                    <a:lstStyle/>
+                    <a:p>
+                      <a:r>
+                        <a:rPr sz="1500" b="0">
+                          <a:solidFill>
+                            <a:srgbClr val="333A42"/>
+                          </a:solidFill>
+                          <a:latin typeface="Calibri"/>
+                        </a:rPr>
+                        <a:t>Flat arrays + __slots__</a:t>
+                      </a:r>
+                    </a:p>
+                  </a:txBody>
+                  <a:tcPr anchor="ctr" marL="128016" marR="128016" marT="0" marB="0">
+                    <a:solidFill>
+                      <a:srgbClr val="FFFFFF"/>
+                    </a:solidFill>
+                  </a:tcPr>
+                </a:tc>
+              </a:tr>
+              <a:tr h="402336">
+                <a:tc>
+                  <a:txBody>
+                    <a:bodyPr/>
+                    <a:lstStyle/>
+                    <a:p>
+                      <a:r>
+                        <a:rPr sz="1500" b="0">
+                          <a:solidFill>
+                            <a:srgbClr val="333A42"/>
+                          </a:solidFill>
+                          <a:latin typeface="Calibri"/>
+                        </a:rPr>
+                        <a:t>Correctness</a:t>
+                      </a:r>
+                    </a:p>
+                  </a:txBody>
+                  <a:tcPr anchor="ctr" marL="128016" marR="128016" marT="0" marB="0">
+                    <a:solidFill>
+                      <a:srgbClr val="F4F6F8"/>
+                    </a:solidFill>
+                  </a:tcPr>
+                </a:tc>
+                <a:tc>
+                  <a:txBody>
+                    <a:bodyPr/>
+                    <a:lstStyle/>
+                    <a:p>
+                      <a:pPr algn="r"/>
+                      <a:r>
+                        <a:rPr sz="1500" b="0">
+                          <a:solidFill>
+                            <a:srgbClr val="333A42"/>
+                          </a:solidFill>
+                          <a:latin typeface="Calibri"/>
+                        </a:rPr>
+                        <a:t>65/65</a:t>
+                      </a:r>
+                    </a:p>
+                  </a:txBody>
+                  <a:tcPr anchor="ctr" marL="128016" marR="128016" marT="0" marB="0">
+                    <a:solidFill>
+                      <a:srgbClr val="F4F6F8"/>
+                    </a:solidFill>
+                  </a:tcPr>
+                </a:tc>
+                <a:tc>
+                  <a:txBody>
+                    <a:bodyPr/>
+                    <a:lstStyle/>
+                    <a:p>
+                      <a:r>
+                        <a:rPr sz="1500" b="0">
+                          <a:solidFill>
+                            <a:srgbClr val="333A42"/>
+                          </a:solidFill>
+                          <a:latin typeface="Calibri"/>
+                        </a:rPr>
+                        <a:t>Same contract, both builds</a:t>
+                      </a:r>
+                    </a:p>
+                  </a:txBody>
+                  <a:tcPr anchor="ctr" marL="128016" marR="128016" marT="0" marB="0">
+                    <a:solidFill>
+                      <a:srgbClr val="F4F6F8"/>
+                    </a:solidFill>
+                  </a:tcPr>
+                </a:tc>
+              </a:tr>
+            </a:tbl>
+          </a:graphicData>
+        </a:graphic>
+      </p:graphicFrame>
     </p:spTree>
   </p:cSld>
   <p:clrMapOvr>
